--- a/謝謝你(崇拜版).pptx
+++ b/謝謝你(崇拜版).pptx
@@ -5,19 +5,19 @@
     <p:sldMasterId id="2147483660" r:id="rId1"/>
   </p:sldMasterIdLst>
   <p:sldIdLst>
-    <p:sldId id="256" r:id="rId2"/>
-    <p:sldId id="257" r:id="rId3"/>
-    <p:sldId id="258" r:id="rId4"/>
-    <p:sldId id="259" r:id="rId5"/>
-    <p:sldId id="260" r:id="rId6"/>
-    <p:sldId id="261" r:id="rId7"/>
-    <p:sldId id="262" r:id="rId8"/>
+    <p:sldId id="391" r:id="rId2"/>
+    <p:sldId id="392" r:id="rId3"/>
+    <p:sldId id="393" r:id="rId4"/>
+    <p:sldId id="394" r:id="rId5"/>
+    <p:sldId id="395" r:id="rId6"/>
+    <p:sldId id="396" r:id="rId7"/>
+    <p:sldId id="397" r:id="rId8"/>
   </p:sldIdLst>
-  <p:sldSz cx="9144000" cy="5143500" type="screen16x9"/>
+  <p:sldSz cx="12192000" cy="6858000"/>
   <p:notesSz cx="6858000" cy="9144000"/>
   <p:defaultTextStyle>
     <a:defPPr>
-      <a:defRPr lang="zh-TW"/>
+      <a:defRPr lang="vi-VN"/>
     </a:defPPr>
     <a:lvl1pPr marL="0" algn="l" defTabSz="914400" rtl="0" eaLnBrk="1" latinLnBrk="0" hangingPunct="1">
       <a:defRPr sz="1800" kern="1200">
@@ -112,18 +112,7 @@
   </p:defaultTextStyle>
   <p:extLst>
     <p:ext uri="{EFAFB233-063F-42B5-8137-9DF3F51BA10A}">
-      <p15:sldGuideLst xmlns:p15="http://schemas.microsoft.com/office/powerpoint/2012/main">
-        <p15:guide id="1" orient="horz" pos="1620">
-          <p15:clr>
-            <a:srgbClr val="A4A3A4"/>
-          </p15:clr>
-        </p15:guide>
-        <p15:guide id="2" pos="2880">
-          <p15:clr>
-            <a:srgbClr val="A4A3A4"/>
-          </p15:clr>
-        </p15:guide>
-      </p15:sldGuideLst>
+      <p15:sldGuideLst xmlns:p15="http://schemas.microsoft.com/office/powerpoint/2012/main"/>
     </p:ext>
   </p:extLst>
 </p:presentation>
@@ -158,8 +147,8 @@
         </p:nvSpPr>
         <p:spPr>
           <a:xfrm>
-            <a:off x="685800" y="1597819"/>
-            <a:ext cx="7772400" cy="1102519"/>
+            <a:off x="914400" y="2130428"/>
+            <a:ext cx="10363200" cy="1470025"/>
           </a:xfrm>
         </p:spPr>
         <p:txBody>
@@ -167,7 +156,7 @@
           <a:lstStyle/>
           <a:p>
             <a:r>
-              <a:rPr lang="en-US" altLang="zh-TW" smtClean="0"/>
+              <a:rPr lang="en-US" altLang="zh-TW"/>
               <a:t>Click to edit Master title style</a:t>
             </a:r>
             <a:endParaRPr lang="zh-TW" altLang="en-US"/>
@@ -186,8 +175,8 @@
         </p:nvSpPr>
         <p:spPr>
           <a:xfrm>
-            <a:off x="1371600" y="2914650"/>
-            <a:ext cx="6400800" cy="1314450"/>
+            <a:off x="1828800" y="3886200"/>
+            <a:ext cx="8534400" cy="1752600"/>
           </a:xfrm>
         </p:spPr>
         <p:txBody>
@@ -203,7 +192,7 @@
                 </a:solidFill>
               </a:defRPr>
             </a:lvl1pPr>
-            <a:lvl2pPr marL="457200" indent="0" algn="ctr">
+            <a:lvl2pPr marL="609585" indent="0" algn="ctr">
               <a:buNone/>
               <a:defRPr>
                 <a:solidFill>
@@ -213,7 +202,7 @@
                 </a:solidFill>
               </a:defRPr>
             </a:lvl2pPr>
-            <a:lvl3pPr marL="914400" indent="0" algn="ctr">
+            <a:lvl3pPr marL="1219170" indent="0" algn="ctr">
               <a:buNone/>
               <a:defRPr>
                 <a:solidFill>
@@ -223,7 +212,7 @@
                 </a:solidFill>
               </a:defRPr>
             </a:lvl3pPr>
-            <a:lvl4pPr marL="1371600" indent="0" algn="ctr">
+            <a:lvl4pPr marL="1828754" indent="0" algn="ctr">
               <a:buNone/>
               <a:defRPr>
                 <a:solidFill>
@@ -233,7 +222,7 @@
                 </a:solidFill>
               </a:defRPr>
             </a:lvl4pPr>
-            <a:lvl5pPr marL="1828800" indent="0" algn="ctr">
+            <a:lvl5pPr marL="2438339" indent="0" algn="ctr">
               <a:buNone/>
               <a:defRPr>
                 <a:solidFill>
@@ -243,7 +232,7 @@
                 </a:solidFill>
               </a:defRPr>
             </a:lvl5pPr>
-            <a:lvl6pPr marL="2286000" indent="0" algn="ctr">
+            <a:lvl6pPr marL="3047924" indent="0" algn="ctr">
               <a:buNone/>
               <a:defRPr>
                 <a:solidFill>
@@ -253,7 +242,7 @@
                 </a:solidFill>
               </a:defRPr>
             </a:lvl6pPr>
-            <a:lvl7pPr marL="2743200" indent="0" algn="ctr">
+            <a:lvl7pPr marL="3657509" indent="0" algn="ctr">
               <a:buNone/>
               <a:defRPr>
                 <a:solidFill>
@@ -263,7 +252,7 @@
                 </a:solidFill>
               </a:defRPr>
             </a:lvl7pPr>
-            <a:lvl8pPr marL="3200400" indent="0" algn="ctr">
+            <a:lvl8pPr marL="4267093" indent="0" algn="ctr">
               <a:buNone/>
               <a:defRPr>
                 <a:solidFill>
@@ -273,7 +262,7 @@
                 </a:solidFill>
               </a:defRPr>
             </a:lvl8pPr>
-            <a:lvl9pPr marL="3657600" indent="0" algn="ctr">
+            <a:lvl9pPr marL="4876678" indent="0" algn="ctr">
               <a:buNone/>
               <a:defRPr>
                 <a:solidFill>
@@ -286,7 +275,7 @@
           </a:lstStyle>
           <a:p>
             <a:r>
-              <a:rPr lang="en-US" altLang="zh-TW" smtClean="0"/>
+              <a:rPr lang="en-US" altLang="zh-TW"/>
               <a:t>Click to edit Master subtitle style</a:t>
             </a:r>
             <a:endParaRPr lang="zh-TW" altLang="en-US"/>
@@ -308,11 +297,11 @@
           <a:bodyPr/>
           <a:lstStyle/>
           <a:p>
-            <a:fld id="{515656C6-E7D2-458B-8896-20BCCA86C4C9}" type="datetimeFigureOut">
-              <a:rPr lang="zh-TW" altLang="en-US" smtClean="0"/>
-              <a:t>2023/11/11</a:t>
+            <a:fld id="{1C488704-7058-4526-95CD-2A163221AB6F}" type="datetimeFigureOut">
+              <a:rPr lang="en-US" smtClean="0"/>
+              <a:t>11/7/2025</a:t>
             </a:fld>
-            <a:endParaRPr lang="zh-TW" altLang="en-US"/>
+            <a:endParaRPr lang="en-US"/>
           </a:p>
         </p:txBody>
       </p:sp>
@@ -331,7 +320,7 @@
           <a:bodyPr/>
           <a:lstStyle/>
           <a:p>
-            <a:endParaRPr lang="zh-TW" altLang="en-US"/>
+            <a:endParaRPr lang="en-US"/>
           </a:p>
         </p:txBody>
       </p:sp>
@@ -350,15 +339,20 @@
           <a:bodyPr/>
           <a:lstStyle/>
           <a:p>
-            <a:fld id="{7470AEE8-56DC-433A-95CF-DC8F390BF088}" type="slidenum">
-              <a:rPr lang="zh-TW" altLang="en-US" smtClean="0"/>
+            <a:fld id="{DC3A5D6F-BA08-4060-B078-EDC13354B14A}" type="slidenum">
+              <a:rPr lang="en-US" smtClean="0"/>
               <a:t>‹#›</a:t>
             </a:fld>
-            <a:endParaRPr lang="zh-TW" altLang="en-US"/>
+            <a:endParaRPr lang="en-US"/>
           </a:p>
         </p:txBody>
       </p:sp>
     </p:spTree>
+    <p:extLst>
+      <p:ext uri="{BB962C8B-B14F-4D97-AF65-F5344CB8AC3E}">
+        <p14:creationId xmlns:p14="http://schemas.microsoft.com/office/powerpoint/2010/main" val="3009613296"/>
+      </p:ext>
+    </p:extLst>
   </p:cSld>
   <p:clrMapOvr>
     <a:masterClrMapping/>
@@ -399,7 +393,7 @@
           <a:lstStyle/>
           <a:p>
             <a:r>
-              <a:rPr lang="en-US" altLang="zh-TW" smtClean="0"/>
+              <a:rPr lang="en-US" altLang="zh-TW"/>
               <a:t>Click to edit Master title style</a:t>
             </a:r>
             <a:endParaRPr lang="zh-TW" altLang="en-US"/>
@@ -423,35 +417,35 @@
           <a:p>
             <a:pPr lvl="0"/>
             <a:r>
-              <a:rPr lang="en-US" altLang="zh-TW" smtClean="0"/>
+              <a:rPr lang="en-US" altLang="zh-TW"/>
               <a:t>Click to edit Master text styles</a:t>
             </a:r>
           </a:p>
           <a:p>
             <a:pPr lvl="1"/>
             <a:r>
-              <a:rPr lang="en-US" altLang="zh-TW" smtClean="0"/>
+              <a:rPr lang="en-US" altLang="zh-TW"/>
               <a:t>Second level</a:t>
             </a:r>
           </a:p>
           <a:p>
             <a:pPr lvl="2"/>
             <a:r>
-              <a:rPr lang="en-US" altLang="zh-TW" smtClean="0"/>
+              <a:rPr lang="en-US" altLang="zh-TW"/>
               <a:t>Third level</a:t>
             </a:r>
           </a:p>
           <a:p>
             <a:pPr lvl="3"/>
             <a:r>
-              <a:rPr lang="en-US" altLang="zh-TW" smtClean="0"/>
+              <a:rPr lang="en-US" altLang="zh-TW"/>
               <a:t>Fourth level</a:t>
             </a:r>
           </a:p>
           <a:p>
             <a:pPr lvl="4"/>
             <a:r>
-              <a:rPr lang="en-US" altLang="zh-TW" smtClean="0"/>
+              <a:rPr lang="en-US" altLang="zh-TW"/>
               <a:t>Fifth level</a:t>
             </a:r>
             <a:endParaRPr lang="zh-TW" altLang="en-US"/>
@@ -473,11 +467,11 @@
           <a:bodyPr/>
           <a:lstStyle/>
           <a:p>
-            <a:fld id="{515656C6-E7D2-458B-8896-20BCCA86C4C9}" type="datetimeFigureOut">
-              <a:rPr lang="zh-TW" altLang="en-US" smtClean="0"/>
-              <a:t>2023/11/11</a:t>
+            <a:fld id="{1C488704-7058-4526-95CD-2A163221AB6F}" type="datetimeFigureOut">
+              <a:rPr lang="en-US" smtClean="0"/>
+              <a:t>11/7/2025</a:t>
             </a:fld>
-            <a:endParaRPr lang="zh-TW" altLang="en-US"/>
+            <a:endParaRPr lang="en-US"/>
           </a:p>
         </p:txBody>
       </p:sp>
@@ -496,7 +490,7 @@
           <a:bodyPr/>
           <a:lstStyle/>
           <a:p>
-            <a:endParaRPr lang="zh-TW" altLang="en-US"/>
+            <a:endParaRPr lang="en-US"/>
           </a:p>
         </p:txBody>
       </p:sp>
@@ -515,15 +509,20 @@
           <a:bodyPr/>
           <a:lstStyle/>
           <a:p>
-            <a:fld id="{7470AEE8-56DC-433A-95CF-DC8F390BF088}" type="slidenum">
-              <a:rPr lang="zh-TW" altLang="en-US" smtClean="0"/>
+            <a:fld id="{DC3A5D6F-BA08-4060-B078-EDC13354B14A}" type="slidenum">
+              <a:rPr lang="en-US" smtClean="0"/>
               <a:t>‹#›</a:t>
             </a:fld>
-            <a:endParaRPr lang="zh-TW" altLang="en-US"/>
+            <a:endParaRPr lang="en-US"/>
           </a:p>
         </p:txBody>
       </p:sp>
     </p:spTree>
+    <p:extLst>
+      <p:ext uri="{BB962C8B-B14F-4D97-AF65-F5344CB8AC3E}">
+        <p14:creationId xmlns:p14="http://schemas.microsoft.com/office/powerpoint/2010/main" val="1695418020"/>
+      </p:ext>
+    </p:extLst>
   </p:cSld>
   <p:clrMapOvr>
     <a:masterClrMapping/>
@@ -560,8 +559,8 @@
         </p:nvSpPr>
         <p:spPr>
           <a:xfrm>
-            <a:off x="6629400" y="205979"/>
-            <a:ext cx="2057400" cy="4388644"/>
+            <a:off x="8839200" y="274639"/>
+            <a:ext cx="2743200" cy="5851525"/>
           </a:xfrm>
         </p:spPr>
         <p:txBody>
@@ -569,7 +568,7 @@
           <a:lstStyle/>
           <a:p>
             <a:r>
-              <a:rPr lang="en-US" altLang="zh-TW" smtClean="0"/>
+              <a:rPr lang="en-US" altLang="zh-TW"/>
               <a:t>Click to edit Master title style</a:t>
             </a:r>
             <a:endParaRPr lang="zh-TW" altLang="en-US"/>
@@ -588,8 +587,8 @@
         </p:nvSpPr>
         <p:spPr>
           <a:xfrm>
-            <a:off x="457200" y="205979"/>
-            <a:ext cx="6019800" cy="4388644"/>
+            <a:off x="609600" y="274639"/>
+            <a:ext cx="8026400" cy="5851525"/>
           </a:xfrm>
         </p:spPr>
         <p:txBody>
@@ -598,35 +597,35 @@
           <a:p>
             <a:pPr lvl="0"/>
             <a:r>
-              <a:rPr lang="en-US" altLang="zh-TW" smtClean="0"/>
+              <a:rPr lang="en-US" altLang="zh-TW"/>
               <a:t>Click to edit Master text styles</a:t>
             </a:r>
           </a:p>
           <a:p>
             <a:pPr lvl="1"/>
             <a:r>
-              <a:rPr lang="en-US" altLang="zh-TW" smtClean="0"/>
+              <a:rPr lang="en-US" altLang="zh-TW"/>
               <a:t>Second level</a:t>
             </a:r>
           </a:p>
           <a:p>
             <a:pPr lvl="2"/>
             <a:r>
-              <a:rPr lang="en-US" altLang="zh-TW" smtClean="0"/>
+              <a:rPr lang="en-US" altLang="zh-TW"/>
               <a:t>Third level</a:t>
             </a:r>
           </a:p>
           <a:p>
             <a:pPr lvl="3"/>
             <a:r>
-              <a:rPr lang="en-US" altLang="zh-TW" smtClean="0"/>
+              <a:rPr lang="en-US" altLang="zh-TW"/>
               <a:t>Fourth level</a:t>
             </a:r>
           </a:p>
           <a:p>
             <a:pPr lvl="4"/>
             <a:r>
-              <a:rPr lang="en-US" altLang="zh-TW" smtClean="0"/>
+              <a:rPr lang="en-US" altLang="zh-TW"/>
               <a:t>Fifth level</a:t>
             </a:r>
             <a:endParaRPr lang="zh-TW" altLang="en-US"/>
@@ -648,11 +647,11 @@
           <a:bodyPr/>
           <a:lstStyle/>
           <a:p>
-            <a:fld id="{515656C6-E7D2-458B-8896-20BCCA86C4C9}" type="datetimeFigureOut">
-              <a:rPr lang="zh-TW" altLang="en-US" smtClean="0"/>
-              <a:t>2023/11/11</a:t>
+            <a:fld id="{1C488704-7058-4526-95CD-2A163221AB6F}" type="datetimeFigureOut">
+              <a:rPr lang="en-US" smtClean="0"/>
+              <a:t>11/7/2025</a:t>
             </a:fld>
-            <a:endParaRPr lang="zh-TW" altLang="en-US"/>
+            <a:endParaRPr lang="en-US"/>
           </a:p>
         </p:txBody>
       </p:sp>
@@ -671,7 +670,7 @@
           <a:bodyPr/>
           <a:lstStyle/>
           <a:p>
-            <a:endParaRPr lang="zh-TW" altLang="en-US"/>
+            <a:endParaRPr lang="en-US"/>
           </a:p>
         </p:txBody>
       </p:sp>
@@ -690,15 +689,20 @@
           <a:bodyPr/>
           <a:lstStyle/>
           <a:p>
-            <a:fld id="{7470AEE8-56DC-433A-95CF-DC8F390BF088}" type="slidenum">
-              <a:rPr lang="zh-TW" altLang="en-US" smtClean="0"/>
+            <a:fld id="{DC3A5D6F-BA08-4060-B078-EDC13354B14A}" type="slidenum">
+              <a:rPr lang="en-US" smtClean="0"/>
               <a:t>‹#›</a:t>
             </a:fld>
-            <a:endParaRPr lang="zh-TW" altLang="en-US"/>
+            <a:endParaRPr lang="en-US"/>
           </a:p>
         </p:txBody>
       </p:sp>
     </p:spTree>
+    <p:extLst>
+      <p:ext uri="{BB962C8B-B14F-4D97-AF65-F5344CB8AC3E}">
+        <p14:creationId xmlns:p14="http://schemas.microsoft.com/office/powerpoint/2010/main" val="1419624945"/>
+      </p:ext>
+    </p:extLst>
   </p:cSld>
   <p:clrMapOvr>
     <a:masterClrMapping/>
@@ -739,7 +743,7 @@
           <a:lstStyle/>
           <a:p>
             <a:r>
-              <a:rPr lang="en-US" altLang="zh-TW" smtClean="0"/>
+              <a:rPr lang="en-US" altLang="zh-TW"/>
               <a:t>Click to edit Master title style</a:t>
             </a:r>
             <a:endParaRPr lang="zh-TW" altLang="en-US"/>
@@ -763,35 +767,35 @@
           <a:p>
             <a:pPr lvl="0"/>
             <a:r>
-              <a:rPr lang="en-US" altLang="zh-TW" smtClean="0"/>
+              <a:rPr lang="en-US" altLang="zh-TW"/>
               <a:t>Click to edit Master text styles</a:t>
             </a:r>
           </a:p>
           <a:p>
             <a:pPr lvl="1"/>
             <a:r>
-              <a:rPr lang="en-US" altLang="zh-TW" smtClean="0"/>
+              <a:rPr lang="en-US" altLang="zh-TW"/>
               <a:t>Second level</a:t>
             </a:r>
           </a:p>
           <a:p>
             <a:pPr lvl="2"/>
             <a:r>
-              <a:rPr lang="en-US" altLang="zh-TW" smtClean="0"/>
+              <a:rPr lang="en-US" altLang="zh-TW"/>
               <a:t>Third level</a:t>
             </a:r>
           </a:p>
           <a:p>
             <a:pPr lvl="3"/>
             <a:r>
-              <a:rPr lang="en-US" altLang="zh-TW" smtClean="0"/>
+              <a:rPr lang="en-US" altLang="zh-TW"/>
               <a:t>Fourth level</a:t>
             </a:r>
           </a:p>
           <a:p>
             <a:pPr lvl="4"/>
             <a:r>
-              <a:rPr lang="en-US" altLang="zh-TW" smtClean="0"/>
+              <a:rPr lang="en-US" altLang="zh-TW"/>
               <a:t>Fifth level</a:t>
             </a:r>
             <a:endParaRPr lang="zh-TW" altLang="en-US"/>
@@ -813,11 +817,11 @@
           <a:bodyPr/>
           <a:lstStyle/>
           <a:p>
-            <a:fld id="{515656C6-E7D2-458B-8896-20BCCA86C4C9}" type="datetimeFigureOut">
-              <a:rPr lang="zh-TW" altLang="en-US" smtClean="0"/>
-              <a:t>2023/11/11</a:t>
+            <a:fld id="{1C488704-7058-4526-95CD-2A163221AB6F}" type="datetimeFigureOut">
+              <a:rPr lang="en-US" smtClean="0"/>
+              <a:t>11/7/2025</a:t>
             </a:fld>
-            <a:endParaRPr lang="zh-TW" altLang="en-US"/>
+            <a:endParaRPr lang="en-US"/>
           </a:p>
         </p:txBody>
       </p:sp>
@@ -836,7 +840,7 @@
           <a:bodyPr/>
           <a:lstStyle/>
           <a:p>
-            <a:endParaRPr lang="zh-TW" altLang="en-US"/>
+            <a:endParaRPr lang="en-US"/>
           </a:p>
         </p:txBody>
       </p:sp>
@@ -855,15 +859,20 @@
           <a:bodyPr/>
           <a:lstStyle/>
           <a:p>
-            <a:fld id="{7470AEE8-56DC-433A-95CF-DC8F390BF088}" type="slidenum">
-              <a:rPr lang="zh-TW" altLang="en-US" smtClean="0"/>
+            <a:fld id="{DC3A5D6F-BA08-4060-B078-EDC13354B14A}" type="slidenum">
+              <a:rPr lang="en-US" smtClean="0"/>
               <a:t>‹#›</a:t>
             </a:fld>
-            <a:endParaRPr lang="zh-TW" altLang="en-US"/>
+            <a:endParaRPr lang="en-US"/>
           </a:p>
         </p:txBody>
       </p:sp>
     </p:spTree>
+    <p:extLst>
+      <p:ext uri="{BB962C8B-B14F-4D97-AF65-F5344CB8AC3E}">
+        <p14:creationId xmlns:p14="http://schemas.microsoft.com/office/powerpoint/2010/main" val="568337030"/>
+      </p:ext>
+    </p:extLst>
   </p:cSld>
   <p:clrMapOvr>
     <a:masterClrMapping/>
@@ -900,20 +909,20 @@
         </p:nvSpPr>
         <p:spPr>
           <a:xfrm>
-            <a:off x="722313" y="3305176"/>
-            <a:ext cx="7772400" cy="1021556"/>
+            <a:off x="963084" y="4406901"/>
+            <a:ext cx="10363200" cy="1362075"/>
           </a:xfrm>
         </p:spPr>
         <p:txBody>
           <a:bodyPr anchor="t"/>
           <a:lstStyle>
             <a:lvl1pPr algn="l">
-              <a:defRPr sz="4000" b="1" cap="all"/>
+              <a:defRPr sz="5333" b="1" cap="all"/>
             </a:lvl1pPr>
           </a:lstStyle>
           <a:p>
             <a:r>
-              <a:rPr lang="en-US" altLang="zh-TW" smtClean="0"/>
+              <a:rPr lang="en-US" altLang="zh-TW"/>
               <a:t>Click to edit Master title style</a:t>
             </a:r>
             <a:endParaRPr lang="zh-TW" altLang="en-US"/>
@@ -932,8 +941,8 @@
         </p:nvSpPr>
         <p:spPr>
           <a:xfrm>
-            <a:off x="722313" y="2180035"/>
-            <a:ext cx="7772400" cy="1125140"/>
+            <a:off x="963084" y="2906713"/>
+            <a:ext cx="10363200" cy="1500187"/>
           </a:xfrm>
         </p:spPr>
         <p:txBody>
@@ -941,7 +950,7 @@
           <a:lstStyle>
             <a:lvl1pPr marL="0" indent="0">
               <a:buNone/>
-              <a:defRPr sz="2000">
+              <a:defRPr sz="2667">
                 <a:solidFill>
                   <a:schemeClr val="tx1">
                     <a:tint val="75000"/>
@@ -949,9 +958,9 @@
                 </a:solidFill>
               </a:defRPr>
             </a:lvl1pPr>
-            <a:lvl2pPr marL="457200" indent="0">
-              <a:buNone/>
-              <a:defRPr sz="1800">
+            <a:lvl2pPr marL="609585" indent="0">
+              <a:buNone/>
+              <a:defRPr sz="2400">
                 <a:solidFill>
                   <a:schemeClr val="tx1">
                     <a:tint val="75000"/>
@@ -959,9 +968,9 @@
                 </a:solidFill>
               </a:defRPr>
             </a:lvl2pPr>
-            <a:lvl3pPr marL="914400" indent="0">
-              <a:buNone/>
-              <a:defRPr sz="1600">
+            <a:lvl3pPr marL="1219170" indent="0">
+              <a:buNone/>
+              <a:defRPr sz="2133">
                 <a:solidFill>
                   <a:schemeClr val="tx1">
                     <a:tint val="75000"/>
@@ -969,9 +978,9 @@
                 </a:solidFill>
               </a:defRPr>
             </a:lvl3pPr>
-            <a:lvl4pPr marL="1371600" indent="0">
-              <a:buNone/>
-              <a:defRPr sz="1400">
+            <a:lvl4pPr marL="1828754" indent="0">
+              <a:buNone/>
+              <a:defRPr sz="1867">
                 <a:solidFill>
                   <a:schemeClr val="tx1">
                     <a:tint val="75000"/>
@@ -979,9 +988,9 @@
                 </a:solidFill>
               </a:defRPr>
             </a:lvl4pPr>
-            <a:lvl5pPr marL="1828800" indent="0">
-              <a:buNone/>
-              <a:defRPr sz="1400">
+            <a:lvl5pPr marL="2438339" indent="0">
+              <a:buNone/>
+              <a:defRPr sz="1867">
                 <a:solidFill>
                   <a:schemeClr val="tx1">
                     <a:tint val="75000"/>
@@ -989,9 +998,9 @@
                 </a:solidFill>
               </a:defRPr>
             </a:lvl5pPr>
-            <a:lvl6pPr marL="2286000" indent="0">
-              <a:buNone/>
-              <a:defRPr sz="1400">
+            <a:lvl6pPr marL="3047924" indent="0">
+              <a:buNone/>
+              <a:defRPr sz="1867">
                 <a:solidFill>
                   <a:schemeClr val="tx1">
                     <a:tint val="75000"/>
@@ -999,9 +1008,9 @@
                 </a:solidFill>
               </a:defRPr>
             </a:lvl6pPr>
-            <a:lvl7pPr marL="2743200" indent="0">
-              <a:buNone/>
-              <a:defRPr sz="1400">
+            <a:lvl7pPr marL="3657509" indent="0">
+              <a:buNone/>
+              <a:defRPr sz="1867">
                 <a:solidFill>
                   <a:schemeClr val="tx1">
                     <a:tint val="75000"/>
@@ -1009,9 +1018,9 @@
                 </a:solidFill>
               </a:defRPr>
             </a:lvl7pPr>
-            <a:lvl8pPr marL="3200400" indent="0">
-              <a:buNone/>
-              <a:defRPr sz="1400">
+            <a:lvl8pPr marL="4267093" indent="0">
+              <a:buNone/>
+              <a:defRPr sz="1867">
                 <a:solidFill>
                   <a:schemeClr val="tx1">
                     <a:tint val="75000"/>
@@ -1019,9 +1028,9 @@
                 </a:solidFill>
               </a:defRPr>
             </a:lvl8pPr>
-            <a:lvl9pPr marL="3657600" indent="0">
-              <a:buNone/>
-              <a:defRPr sz="1400">
+            <a:lvl9pPr marL="4876678" indent="0">
+              <a:buNone/>
+              <a:defRPr sz="1867">
                 <a:solidFill>
                   <a:schemeClr val="tx1">
                     <a:tint val="75000"/>
@@ -1033,7 +1042,7 @@
           <a:p>
             <a:pPr lvl="0"/>
             <a:r>
-              <a:rPr lang="en-US" altLang="zh-TW" smtClean="0"/>
+              <a:rPr lang="en-US" altLang="zh-TW"/>
               <a:t>Click to edit Master text styles</a:t>
             </a:r>
           </a:p>
@@ -1054,11 +1063,11 @@
           <a:bodyPr/>
           <a:lstStyle/>
           <a:p>
-            <a:fld id="{515656C6-E7D2-458B-8896-20BCCA86C4C9}" type="datetimeFigureOut">
-              <a:rPr lang="zh-TW" altLang="en-US" smtClean="0"/>
-              <a:t>2023/11/11</a:t>
+            <a:fld id="{1C488704-7058-4526-95CD-2A163221AB6F}" type="datetimeFigureOut">
+              <a:rPr lang="en-US" smtClean="0"/>
+              <a:t>11/7/2025</a:t>
             </a:fld>
-            <a:endParaRPr lang="zh-TW" altLang="en-US"/>
+            <a:endParaRPr lang="en-US"/>
           </a:p>
         </p:txBody>
       </p:sp>
@@ -1077,7 +1086,7 @@
           <a:bodyPr/>
           <a:lstStyle/>
           <a:p>
-            <a:endParaRPr lang="zh-TW" altLang="en-US"/>
+            <a:endParaRPr lang="en-US"/>
           </a:p>
         </p:txBody>
       </p:sp>
@@ -1096,15 +1105,20 @@
           <a:bodyPr/>
           <a:lstStyle/>
           <a:p>
-            <a:fld id="{7470AEE8-56DC-433A-95CF-DC8F390BF088}" type="slidenum">
-              <a:rPr lang="zh-TW" altLang="en-US" smtClean="0"/>
+            <a:fld id="{DC3A5D6F-BA08-4060-B078-EDC13354B14A}" type="slidenum">
+              <a:rPr lang="en-US" smtClean="0"/>
               <a:t>‹#›</a:t>
             </a:fld>
-            <a:endParaRPr lang="zh-TW" altLang="en-US"/>
+            <a:endParaRPr lang="en-US"/>
           </a:p>
         </p:txBody>
       </p:sp>
     </p:spTree>
+    <p:extLst>
+      <p:ext uri="{BB962C8B-B14F-4D97-AF65-F5344CB8AC3E}">
+        <p14:creationId xmlns:p14="http://schemas.microsoft.com/office/powerpoint/2010/main" val="1909794818"/>
+      </p:ext>
+    </p:extLst>
   </p:cSld>
   <p:clrMapOvr>
     <a:masterClrMapping/>
@@ -1145,7 +1159,7 @@
           <a:lstStyle/>
           <a:p>
             <a:r>
-              <a:rPr lang="en-US" altLang="zh-TW" smtClean="0"/>
+              <a:rPr lang="en-US" altLang="zh-TW"/>
               <a:t>Click to edit Master title style</a:t>
             </a:r>
             <a:endParaRPr lang="zh-TW" altLang="en-US"/>
@@ -1164,73 +1178,73 @@
         </p:nvSpPr>
         <p:spPr>
           <a:xfrm>
-            <a:off x="457200" y="1200151"/>
-            <a:ext cx="4038600" cy="3394472"/>
+            <a:off x="609600" y="1600201"/>
+            <a:ext cx="5384800" cy="4525963"/>
           </a:xfrm>
         </p:spPr>
         <p:txBody>
           <a:bodyPr/>
           <a:lstStyle>
             <a:lvl1pPr>
-              <a:defRPr sz="2800"/>
+              <a:defRPr sz="3733"/>
             </a:lvl1pPr>
             <a:lvl2pPr>
-              <a:defRPr sz="2400"/>
+              <a:defRPr sz="3200"/>
             </a:lvl2pPr>
             <a:lvl3pPr>
-              <a:defRPr sz="2000"/>
+              <a:defRPr sz="2667"/>
             </a:lvl3pPr>
             <a:lvl4pPr>
-              <a:defRPr sz="1800"/>
+              <a:defRPr sz="2400"/>
             </a:lvl4pPr>
             <a:lvl5pPr>
-              <a:defRPr sz="1800"/>
+              <a:defRPr sz="2400"/>
             </a:lvl5pPr>
             <a:lvl6pPr>
-              <a:defRPr sz="1800"/>
+              <a:defRPr sz="2400"/>
             </a:lvl6pPr>
             <a:lvl7pPr>
-              <a:defRPr sz="1800"/>
+              <a:defRPr sz="2400"/>
             </a:lvl7pPr>
             <a:lvl8pPr>
-              <a:defRPr sz="1800"/>
+              <a:defRPr sz="2400"/>
             </a:lvl8pPr>
             <a:lvl9pPr>
-              <a:defRPr sz="1800"/>
+              <a:defRPr sz="2400"/>
             </a:lvl9pPr>
           </a:lstStyle>
           <a:p>
             <a:pPr lvl="0"/>
             <a:r>
-              <a:rPr lang="en-US" altLang="zh-TW" smtClean="0"/>
+              <a:rPr lang="en-US" altLang="zh-TW"/>
               <a:t>Click to edit Master text styles</a:t>
             </a:r>
           </a:p>
           <a:p>
             <a:pPr lvl="1"/>
             <a:r>
-              <a:rPr lang="en-US" altLang="zh-TW" smtClean="0"/>
+              <a:rPr lang="en-US" altLang="zh-TW"/>
               <a:t>Second level</a:t>
             </a:r>
           </a:p>
           <a:p>
             <a:pPr lvl="2"/>
             <a:r>
-              <a:rPr lang="en-US" altLang="zh-TW" smtClean="0"/>
+              <a:rPr lang="en-US" altLang="zh-TW"/>
               <a:t>Third level</a:t>
             </a:r>
           </a:p>
           <a:p>
             <a:pPr lvl="3"/>
             <a:r>
-              <a:rPr lang="en-US" altLang="zh-TW" smtClean="0"/>
+              <a:rPr lang="en-US" altLang="zh-TW"/>
               <a:t>Fourth level</a:t>
             </a:r>
           </a:p>
           <a:p>
             <a:pPr lvl="4"/>
             <a:r>
-              <a:rPr lang="en-US" altLang="zh-TW" smtClean="0"/>
+              <a:rPr lang="en-US" altLang="zh-TW"/>
               <a:t>Fifth level</a:t>
             </a:r>
             <a:endParaRPr lang="zh-TW" altLang="en-US"/>
@@ -1249,73 +1263,73 @@
         </p:nvSpPr>
         <p:spPr>
           <a:xfrm>
-            <a:off x="4648200" y="1200151"/>
-            <a:ext cx="4038600" cy="3394472"/>
+            <a:off x="6197600" y="1600201"/>
+            <a:ext cx="5384800" cy="4525963"/>
           </a:xfrm>
         </p:spPr>
         <p:txBody>
           <a:bodyPr/>
           <a:lstStyle>
             <a:lvl1pPr>
-              <a:defRPr sz="2800"/>
+              <a:defRPr sz="3733"/>
             </a:lvl1pPr>
             <a:lvl2pPr>
-              <a:defRPr sz="2400"/>
+              <a:defRPr sz="3200"/>
             </a:lvl2pPr>
             <a:lvl3pPr>
-              <a:defRPr sz="2000"/>
+              <a:defRPr sz="2667"/>
             </a:lvl3pPr>
             <a:lvl4pPr>
-              <a:defRPr sz="1800"/>
+              <a:defRPr sz="2400"/>
             </a:lvl4pPr>
             <a:lvl5pPr>
-              <a:defRPr sz="1800"/>
+              <a:defRPr sz="2400"/>
             </a:lvl5pPr>
             <a:lvl6pPr>
-              <a:defRPr sz="1800"/>
+              <a:defRPr sz="2400"/>
             </a:lvl6pPr>
             <a:lvl7pPr>
-              <a:defRPr sz="1800"/>
+              <a:defRPr sz="2400"/>
             </a:lvl7pPr>
             <a:lvl8pPr>
-              <a:defRPr sz="1800"/>
+              <a:defRPr sz="2400"/>
             </a:lvl8pPr>
             <a:lvl9pPr>
-              <a:defRPr sz="1800"/>
+              <a:defRPr sz="2400"/>
             </a:lvl9pPr>
           </a:lstStyle>
           <a:p>
             <a:pPr lvl="0"/>
             <a:r>
-              <a:rPr lang="en-US" altLang="zh-TW" smtClean="0"/>
+              <a:rPr lang="en-US" altLang="zh-TW"/>
               <a:t>Click to edit Master text styles</a:t>
             </a:r>
           </a:p>
           <a:p>
             <a:pPr lvl="1"/>
             <a:r>
-              <a:rPr lang="en-US" altLang="zh-TW" smtClean="0"/>
+              <a:rPr lang="en-US" altLang="zh-TW"/>
               <a:t>Second level</a:t>
             </a:r>
           </a:p>
           <a:p>
             <a:pPr lvl="2"/>
             <a:r>
-              <a:rPr lang="en-US" altLang="zh-TW" smtClean="0"/>
+              <a:rPr lang="en-US" altLang="zh-TW"/>
               <a:t>Third level</a:t>
             </a:r>
           </a:p>
           <a:p>
             <a:pPr lvl="3"/>
             <a:r>
-              <a:rPr lang="en-US" altLang="zh-TW" smtClean="0"/>
+              <a:rPr lang="en-US" altLang="zh-TW"/>
               <a:t>Fourth level</a:t>
             </a:r>
           </a:p>
           <a:p>
             <a:pPr lvl="4"/>
             <a:r>
-              <a:rPr lang="en-US" altLang="zh-TW" smtClean="0"/>
+              <a:rPr lang="en-US" altLang="zh-TW"/>
               <a:t>Fifth level</a:t>
             </a:r>
             <a:endParaRPr lang="zh-TW" altLang="en-US"/>
@@ -1337,11 +1351,11 @@
           <a:bodyPr/>
           <a:lstStyle/>
           <a:p>
-            <a:fld id="{515656C6-E7D2-458B-8896-20BCCA86C4C9}" type="datetimeFigureOut">
-              <a:rPr lang="zh-TW" altLang="en-US" smtClean="0"/>
-              <a:t>2023/11/11</a:t>
+            <a:fld id="{1C488704-7058-4526-95CD-2A163221AB6F}" type="datetimeFigureOut">
+              <a:rPr lang="en-US" smtClean="0"/>
+              <a:t>11/7/2025</a:t>
             </a:fld>
-            <a:endParaRPr lang="zh-TW" altLang="en-US"/>
+            <a:endParaRPr lang="en-US"/>
           </a:p>
         </p:txBody>
       </p:sp>
@@ -1360,7 +1374,7 @@
           <a:bodyPr/>
           <a:lstStyle/>
           <a:p>
-            <a:endParaRPr lang="zh-TW" altLang="en-US"/>
+            <a:endParaRPr lang="en-US"/>
           </a:p>
         </p:txBody>
       </p:sp>
@@ -1379,15 +1393,20 @@
           <a:bodyPr/>
           <a:lstStyle/>
           <a:p>
-            <a:fld id="{7470AEE8-56DC-433A-95CF-DC8F390BF088}" type="slidenum">
-              <a:rPr lang="zh-TW" altLang="en-US" smtClean="0"/>
+            <a:fld id="{DC3A5D6F-BA08-4060-B078-EDC13354B14A}" type="slidenum">
+              <a:rPr lang="en-US" smtClean="0"/>
               <a:t>‹#›</a:t>
             </a:fld>
-            <a:endParaRPr lang="zh-TW" altLang="en-US"/>
+            <a:endParaRPr lang="en-US"/>
           </a:p>
         </p:txBody>
       </p:sp>
     </p:spTree>
+    <p:extLst>
+      <p:ext uri="{BB962C8B-B14F-4D97-AF65-F5344CB8AC3E}">
+        <p14:creationId xmlns:p14="http://schemas.microsoft.com/office/powerpoint/2010/main" val="1080896849"/>
+      </p:ext>
+    </p:extLst>
   </p:cSld>
   <p:clrMapOvr>
     <a:masterClrMapping/>
@@ -1432,7 +1451,7 @@
           </a:lstStyle>
           <a:p>
             <a:r>
-              <a:rPr lang="en-US" altLang="zh-TW" smtClean="0"/>
+              <a:rPr lang="en-US" altLang="zh-TW"/>
               <a:t>Click to edit Master title style</a:t>
             </a:r>
             <a:endParaRPr lang="zh-TW" altLang="en-US"/>
@@ -1451,8 +1470,8 @@
         </p:nvSpPr>
         <p:spPr>
           <a:xfrm>
-            <a:off x="457200" y="1151335"/>
-            <a:ext cx="4040188" cy="479822"/>
+            <a:off x="609600" y="1535113"/>
+            <a:ext cx="5386917" cy="639763"/>
           </a:xfrm>
         </p:spPr>
         <p:txBody>
@@ -1460,45 +1479,45 @@
           <a:lstStyle>
             <a:lvl1pPr marL="0" indent="0">
               <a:buNone/>
+              <a:defRPr sz="3200" b="1"/>
+            </a:lvl1pPr>
+            <a:lvl2pPr marL="609585" indent="0">
+              <a:buNone/>
+              <a:defRPr sz="2667" b="1"/>
+            </a:lvl2pPr>
+            <a:lvl3pPr marL="1219170" indent="0">
+              <a:buNone/>
               <a:defRPr sz="2400" b="1"/>
-            </a:lvl1pPr>
-            <a:lvl2pPr marL="457200" indent="0">
-              <a:buNone/>
-              <a:defRPr sz="2000" b="1"/>
-            </a:lvl2pPr>
-            <a:lvl3pPr marL="914400" indent="0">
-              <a:buNone/>
-              <a:defRPr sz="1800" b="1"/>
             </a:lvl3pPr>
-            <a:lvl4pPr marL="1371600" indent="0">
-              <a:buNone/>
-              <a:defRPr sz="1600" b="1"/>
+            <a:lvl4pPr marL="1828754" indent="0">
+              <a:buNone/>
+              <a:defRPr sz="2133" b="1"/>
             </a:lvl4pPr>
-            <a:lvl5pPr marL="1828800" indent="0">
-              <a:buNone/>
-              <a:defRPr sz="1600" b="1"/>
+            <a:lvl5pPr marL="2438339" indent="0">
+              <a:buNone/>
+              <a:defRPr sz="2133" b="1"/>
             </a:lvl5pPr>
-            <a:lvl6pPr marL="2286000" indent="0">
-              <a:buNone/>
-              <a:defRPr sz="1600" b="1"/>
+            <a:lvl6pPr marL="3047924" indent="0">
+              <a:buNone/>
+              <a:defRPr sz="2133" b="1"/>
             </a:lvl6pPr>
-            <a:lvl7pPr marL="2743200" indent="0">
-              <a:buNone/>
-              <a:defRPr sz="1600" b="1"/>
+            <a:lvl7pPr marL="3657509" indent="0">
+              <a:buNone/>
+              <a:defRPr sz="2133" b="1"/>
             </a:lvl7pPr>
-            <a:lvl8pPr marL="3200400" indent="0">
-              <a:buNone/>
-              <a:defRPr sz="1600" b="1"/>
+            <a:lvl8pPr marL="4267093" indent="0">
+              <a:buNone/>
+              <a:defRPr sz="2133" b="1"/>
             </a:lvl8pPr>
-            <a:lvl9pPr marL="3657600" indent="0">
-              <a:buNone/>
-              <a:defRPr sz="1600" b="1"/>
+            <a:lvl9pPr marL="4876678" indent="0">
+              <a:buNone/>
+              <a:defRPr sz="2133" b="1"/>
             </a:lvl9pPr>
           </a:lstStyle>
           <a:p>
             <a:pPr lvl="0"/>
             <a:r>
-              <a:rPr lang="en-US" altLang="zh-TW" smtClean="0"/>
+              <a:rPr lang="en-US" altLang="zh-TW"/>
               <a:t>Click to edit Master text styles</a:t>
             </a:r>
           </a:p>
@@ -1516,73 +1535,73 @@
         </p:nvSpPr>
         <p:spPr>
           <a:xfrm>
-            <a:off x="457200" y="1631156"/>
-            <a:ext cx="4040188" cy="2963466"/>
+            <a:off x="609600" y="2174875"/>
+            <a:ext cx="5386917" cy="3951288"/>
           </a:xfrm>
         </p:spPr>
         <p:txBody>
           <a:bodyPr/>
           <a:lstStyle>
             <a:lvl1pPr>
-              <a:defRPr sz="2400"/>
+              <a:defRPr sz="3200"/>
             </a:lvl1pPr>
             <a:lvl2pPr>
-              <a:defRPr sz="2000"/>
+              <a:defRPr sz="2667"/>
             </a:lvl2pPr>
             <a:lvl3pPr>
-              <a:defRPr sz="1800"/>
+              <a:defRPr sz="2400"/>
             </a:lvl3pPr>
             <a:lvl4pPr>
-              <a:defRPr sz="1600"/>
+              <a:defRPr sz="2133"/>
             </a:lvl4pPr>
             <a:lvl5pPr>
-              <a:defRPr sz="1600"/>
+              <a:defRPr sz="2133"/>
             </a:lvl5pPr>
             <a:lvl6pPr>
-              <a:defRPr sz="1600"/>
+              <a:defRPr sz="2133"/>
             </a:lvl6pPr>
             <a:lvl7pPr>
-              <a:defRPr sz="1600"/>
+              <a:defRPr sz="2133"/>
             </a:lvl7pPr>
             <a:lvl8pPr>
-              <a:defRPr sz="1600"/>
+              <a:defRPr sz="2133"/>
             </a:lvl8pPr>
             <a:lvl9pPr>
-              <a:defRPr sz="1600"/>
+              <a:defRPr sz="2133"/>
             </a:lvl9pPr>
           </a:lstStyle>
           <a:p>
             <a:pPr lvl="0"/>
             <a:r>
-              <a:rPr lang="en-US" altLang="zh-TW" smtClean="0"/>
+              <a:rPr lang="en-US" altLang="zh-TW"/>
               <a:t>Click to edit Master text styles</a:t>
             </a:r>
           </a:p>
           <a:p>
             <a:pPr lvl="1"/>
             <a:r>
-              <a:rPr lang="en-US" altLang="zh-TW" smtClean="0"/>
+              <a:rPr lang="en-US" altLang="zh-TW"/>
               <a:t>Second level</a:t>
             </a:r>
           </a:p>
           <a:p>
             <a:pPr lvl="2"/>
             <a:r>
-              <a:rPr lang="en-US" altLang="zh-TW" smtClean="0"/>
+              <a:rPr lang="en-US" altLang="zh-TW"/>
               <a:t>Third level</a:t>
             </a:r>
           </a:p>
           <a:p>
             <a:pPr lvl="3"/>
             <a:r>
-              <a:rPr lang="en-US" altLang="zh-TW" smtClean="0"/>
+              <a:rPr lang="en-US" altLang="zh-TW"/>
               <a:t>Fourth level</a:t>
             </a:r>
           </a:p>
           <a:p>
             <a:pPr lvl="4"/>
             <a:r>
-              <a:rPr lang="en-US" altLang="zh-TW" smtClean="0"/>
+              <a:rPr lang="en-US" altLang="zh-TW"/>
               <a:t>Fifth level</a:t>
             </a:r>
             <a:endParaRPr lang="zh-TW" altLang="en-US"/>
@@ -1601,8 +1620,8 @@
         </p:nvSpPr>
         <p:spPr>
           <a:xfrm>
-            <a:off x="4645026" y="1151335"/>
-            <a:ext cx="4041775" cy="479822"/>
+            <a:off x="6193372" y="1535113"/>
+            <a:ext cx="5389033" cy="639763"/>
           </a:xfrm>
         </p:spPr>
         <p:txBody>
@@ -1610,45 +1629,45 @@
           <a:lstStyle>
             <a:lvl1pPr marL="0" indent="0">
               <a:buNone/>
+              <a:defRPr sz="3200" b="1"/>
+            </a:lvl1pPr>
+            <a:lvl2pPr marL="609585" indent="0">
+              <a:buNone/>
+              <a:defRPr sz="2667" b="1"/>
+            </a:lvl2pPr>
+            <a:lvl3pPr marL="1219170" indent="0">
+              <a:buNone/>
               <a:defRPr sz="2400" b="1"/>
-            </a:lvl1pPr>
-            <a:lvl2pPr marL="457200" indent="0">
-              <a:buNone/>
-              <a:defRPr sz="2000" b="1"/>
-            </a:lvl2pPr>
-            <a:lvl3pPr marL="914400" indent="0">
-              <a:buNone/>
-              <a:defRPr sz="1800" b="1"/>
             </a:lvl3pPr>
-            <a:lvl4pPr marL="1371600" indent="0">
-              <a:buNone/>
-              <a:defRPr sz="1600" b="1"/>
+            <a:lvl4pPr marL="1828754" indent="0">
+              <a:buNone/>
+              <a:defRPr sz="2133" b="1"/>
             </a:lvl4pPr>
-            <a:lvl5pPr marL="1828800" indent="0">
-              <a:buNone/>
-              <a:defRPr sz="1600" b="1"/>
+            <a:lvl5pPr marL="2438339" indent="0">
+              <a:buNone/>
+              <a:defRPr sz="2133" b="1"/>
             </a:lvl5pPr>
-            <a:lvl6pPr marL="2286000" indent="0">
-              <a:buNone/>
-              <a:defRPr sz="1600" b="1"/>
+            <a:lvl6pPr marL="3047924" indent="0">
+              <a:buNone/>
+              <a:defRPr sz="2133" b="1"/>
             </a:lvl6pPr>
-            <a:lvl7pPr marL="2743200" indent="0">
-              <a:buNone/>
-              <a:defRPr sz="1600" b="1"/>
+            <a:lvl7pPr marL="3657509" indent="0">
+              <a:buNone/>
+              <a:defRPr sz="2133" b="1"/>
             </a:lvl7pPr>
-            <a:lvl8pPr marL="3200400" indent="0">
-              <a:buNone/>
-              <a:defRPr sz="1600" b="1"/>
+            <a:lvl8pPr marL="4267093" indent="0">
+              <a:buNone/>
+              <a:defRPr sz="2133" b="1"/>
             </a:lvl8pPr>
-            <a:lvl9pPr marL="3657600" indent="0">
-              <a:buNone/>
-              <a:defRPr sz="1600" b="1"/>
+            <a:lvl9pPr marL="4876678" indent="0">
+              <a:buNone/>
+              <a:defRPr sz="2133" b="1"/>
             </a:lvl9pPr>
           </a:lstStyle>
           <a:p>
             <a:pPr lvl="0"/>
             <a:r>
-              <a:rPr lang="en-US" altLang="zh-TW" smtClean="0"/>
+              <a:rPr lang="en-US" altLang="zh-TW"/>
               <a:t>Click to edit Master text styles</a:t>
             </a:r>
           </a:p>
@@ -1666,73 +1685,73 @@
         </p:nvSpPr>
         <p:spPr>
           <a:xfrm>
-            <a:off x="4645026" y="1631156"/>
-            <a:ext cx="4041775" cy="2963466"/>
+            <a:off x="6193372" y="2174875"/>
+            <a:ext cx="5389033" cy="3951288"/>
           </a:xfrm>
         </p:spPr>
         <p:txBody>
           <a:bodyPr/>
           <a:lstStyle>
             <a:lvl1pPr>
-              <a:defRPr sz="2400"/>
+              <a:defRPr sz="3200"/>
             </a:lvl1pPr>
             <a:lvl2pPr>
-              <a:defRPr sz="2000"/>
+              <a:defRPr sz="2667"/>
             </a:lvl2pPr>
             <a:lvl3pPr>
-              <a:defRPr sz="1800"/>
+              <a:defRPr sz="2400"/>
             </a:lvl3pPr>
             <a:lvl4pPr>
-              <a:defRPr sz="1600"/>
+              <a:defRPr sz="2133"/>
             </a:lvl4pPr>
             <a:lvl5pPr>
-              <a:defRPr sz="1600"/>
+              <a:defRPr sz="2133"/>
             </a:lvl5pPr>
             <a:lvl6pPr>
-              <a:defRPr sz="1600"/>
+              <a:defRPr sz="2133"/>
             </a:lvl6pPr>
             <a:lvl7pPr>
-              <a:defRPr sz="1600"/>
+              <a:defRPr sz="2133"/>
             </a:lvl7pPr>
             <a:lvl8pPr>
-              <a:defRPr sz="1600"/>
+              <a:defRPr sz="2133"/>
             </a:lvl8pPr>
             <a:lvl9pPr>
-              <a:defRPr sz="1600"/>
+              <a:defRPr sz="2133"/>
             </a:lvl9pPr>
           </a:lstStyle>
           <a:p>
             <a:pPr lvl="0"/>
             <a:r>
-              <a:rPr lang="en-US" altLang="zh-TW" smtClean="0"/>
+              <a:rPr lang="en-US" altLang="zh-TW"/>
               <a:t>Click to edit Master text styles</a:t>
             </a:r>
           </a:p>
           <a:p>
             <a:pPr lvl="1"/>
             <a:r>
-              <a:rPr lang="en-US" altLang="zh-TW" smtClean="0"/>
+              <a:rPr lang="en-US" altLang="zh-TW"/>
               <a:t>Second level</a:t>
             </a:r>
           </a:p>
           <a:p>
             <a:pPr lvl="2"/>
             <a:r>
-              <a:rPr lang="en-US" altLang="zh-TW" smtClean="0"/>
+              <a:rPr lang="en-US" altLang="zh-TW"/>
               <a:t>Third level</a:t>
             </a:r>
           </a:p>
           <a:p>
             <a:pPr lvl="3"/>
             <a:r>
-              <a:rPr lang="en-US" altLang="zh-TW" smtClean="0"/>
+              <a:rPr lang="en-US" altLang="zh-TW"/>
               <a:t>Fourth level</a:t>
             </a:r>
           </a:p>
           <a:p>
             <a:pPr lvl="4"/>
             <a:r>
-              <a:rPr lang="en-US" altLang="zh-TW" smtClean="0"/>
+              <a:rPr lang="en-US" altLang="zh-TW"/>
               <a:t>Fifth level</a:t>
             </a:r>
             <a:endParaRPr lang="zh-TW" altLang="en-US"/>
@@ -1754,11 +1773,11 @@
           <a:bodyPr/>
           <a:lstStyle/>
           <a:p>
-            <a:fld id="{515656C6-E7D2-458B-8896-20BCCA86C4C9}" type="datetimeFigureOut">
-              <a:rPr lang="zh-TW" altLang="en-US" smtClean="0"/>
-              <a:t>2023/11/11</a:t>
+            <a:fld id="{1C488704-7058-4526-95CD-2A163221AB6F}" type="datetimeFigureOut">
+              <a:rPr lang="en-US" smtClean="0"/>
+              <a:t>11/7/2025</a:t>
             </a:fld>
-            <a:endParaRPr lang="zh-TW" altLang="en-US"/>
+            <a:endParaRPr lang="en-US"/>
           </a:p>
         </p:txBody>
       </p:sp>
@@ -1777,7 +1796,7 @@
           <a:bodyPr/>
           <a:lstStyle/>
           <a:p>
-            <a:endParaRPr lang="zh-TW" altLang="en-US"/>
+            <a:endParaRPr lang="en-US"/>
           </a:p>
         </p:txBody>
       </p:sp>
@@ -1796,15 +1815,20 @@
           <a:bodyPr/>
           <a:lstStyle/>
           <a:p>
-            <a:fld id="{7470AEE8-56DC-433A-95CF-DC8F390BF088}" type="slidenum">
-              <a:rPr lang="zh-TW" altLang="en-US" smtClean="0"/>
+            <a:fld id="{DC3A5D6F-BA08-4060-B078-EDC13354B14A}" type="slidenum">
+              <a:rPr lang="en-US" smtClean="0"/>
               <a:t>‹#›</a:t>
             </a:fld>
-            <a:endParaRPr lang="zh-TW" altLang="en-US"/>
+            <a:endParaRPr lang="en-US"/>
           </a:p>
         </p:txBody>
       </p:sp>
     </p:spTree>
+    <p:extLst>
+      <p:ext uri="{BB962C8B-B14F-4D97-AF65-F5344CB8AC3E}">
+        <p14:creationId xmlns:p14="http://schemas.microsoft.com/office/powerpoint/2010/main" val="4182221447"/>
+      </p:ext>
+    </p:extLst>
   </p:cSld>
   <p:clrMapOvr>
     <a:masterClrMapping/>
@@ -1845,7 +1869,7 @@
           <a:lstStyle/>
           <a:p>
             <a:r>
-              <a:rPr lang="en-US" altLang="zh-TW" smtClean="0"/>
+              <a:rPr lang="en-US" altLang="zh-TW"/>
               <a:t>Click to edit Master title style</a:t>
             </a:r>
             <a:endParaRPr lang="zh-TW" altLang="en-US"/>
@@ -1867,11 +1891,11 @@
           <a:bodyPr/>
           <a:lstStyle/>
           <a:p>
-            <a:fld id="{515656C6-E7D2-458B-8896-20BCCA86C4C9}" type="datetimeFigureOut">
-              <a:rPr lang="zh-TW" altLang="en-US" smtClean="0"/>
-              <a:t>2023/11/11</a:t>
+            <a:fld id="{1C488704-7058-4526-95CD-2A163221AB6F}" type="datetimeFigureOut">
+              <a:rPr lang="en-US" smtClean="0"/>
+              <a:t>11/7/2025</a:t>
             </a:fld>
-            <a:endParaRPr lang="zh-TW" altLang="en-US"/>
+            <a:endParaRPr lang="en-US"/>
           </a:p>
         </p:txBody>
       </p:sp>
@@ -1890,7 +1914,7 @@
           <a:bodyPr/>
           <a:lstStyle/>
           <a:p>
-            <a:endParaRPr lang="zh-TW" altLang="en-US"/>
+            <a:endParaRPr lang="en-US"/>
           </a:p>
         </p:txBody>
       </p:sp>
@@ -1909,15 +1933,20 @@
           <a:bodyPr/>
           <a:lstStyle/>
           <a:p>
-            <a:fld id="{7470AEE8-56DC-433A-95CF-DC8F390BF088}" type="slidenum">
-              <a:rPr lang="zh-TW" altLang="en-US" smtClean="0"/>
+            <a:fld id="{DC3A5D6F-BA08-4060-B078-EDC13354B14A}" type="slidenum">
+              <a:rPr lang="en-US" smtClean="0"/>
               <a:t>‹#›</a:t>
             </a:fld>
-            <a:endParaRPr lang="zh-TW" altLang="en-US"/>
+            <a:endParaRPr lang="en-US"/>
           </a:p>
         </p:txBody>
       </p:sp>
     </p:spTree>
+    <p:extLst>
+      <p:ext uri="{BB962C8B-B14F-4D97-AF65-F5344CB8AC3E}">
+        <p14:creationId xmlns:p14="http://schemas.microsoft.com/office/powerpoint/2010/main" val="1158377669"/>
+      </p:ext>
+    </p:extLst>
   </p:cSld>
   <p:clrMapOvr>
     <a:masterClrMapping/>
@@ -1957,11 +1986,11 @@
           <a:bodyPr/>
           <a:lstStyle/>
           <a:p>
-            <a:fld id="{515656C6-E7D2-458B-8896-20BCCA86C4C9}" type="datetimeFigureOut">
-              <a:rPr lang="zh-TW" altLang="en-US" smtClean="0"/>
-              <a:t>2023/11/11</a:t>
+            <a:fld id="{1C488704-7058-4526-95CD-2A163221AB6F}" type="datetimeFigureOut">
+              <a:rPr lang="en-US" smtClean="0"/>
+              <a:t>11/7/2025</a:t>
             </a:fld>
-            <a:endParaRPr lang="zh-TW" altLang="en-US"/>
+            <a:endParaRPr lang="en-US"/>
           </a:p>
         </p:txBody>
       </p:sp>
@@ -1980,7 +2009,7 @@
           <a:bodyPr/>
           <a:lstStyle/>
           <a:p>
-            <a:endParaRPr lang="zh-TW" altLang="en-US"/>
+            <a:endParaRPr lang="en-US"/>
           </a:p>
         </p:txBody>
       </p:sp>
@@ -1999,15 +2028,20 @@
           <a:bodyPr/>
           <a:lstStyle/>
           <a:p>
-            <a:fld id="{7470AEE8-56DC-433A-95CF-DC8F390BF088}" type="slidenum">
-              <a:rPr lang="zh-TW" altLang="en-US" smtClean="0"/>
+            <a:fld id="{DC3A5D6F-BA08-4060-B078-EDC13354B14A}" type="slidenum">
+              <a:rPr lang="en-US" smtClean="0"/>
               <a:t>‹#›</a:t>
             </a:fld>
-            <a:endParaRPr lang="zh-TW" altLang="en-US"/>
+            <a:endParaRPr lang="en-US"/>
           </a:p>
         </p:txBody>
       </p:sp>
     </p:spTree>
+    <p:extLst>
+      <p:ext uri="{BB962C8B-B14F-4D97-AF65-F5344CB8AC3E}">
+        <p14:creationId xmlns:p14="http://schemas.microsoft.com/office/powerpoint/2010/main" val="580719725"/>
+      </p:ext>
+    </p:extLst>
   </p:cSld>
   <p:clrMapOvr>
     <a:masterClrMapping/>
@@ -2044,20 +2078,20 @@
         </p:nvSpPr>
         <p:spPr>
           <a:xfrm>
-            <a:off x="457201" y="204787"/>
-            <a:ext cx="3008313" cy="871538"/>
+            <a:off x="609603" y="273049"/>
+            <a:ext cx="4011084" cy="1162051"/>
           </a:xfrm>
         </p:spPr>
         <p:txBody>
           <a:bodyPr anchor="b"/>
           <a:lstStyle>
             <a:lvl1pPr algn="l">
-              <a:defRPr sz="2000" b="1"/>
+              <a:defRPr sz="2667" b="1"/>
             </a:lvl1pPr>
           </a:lstStyle>
           <a:p>
             <a:r>
-              <a:rPr lang="en-US" altLang="zh-TW" smtClean="0"/>
+              <a:rPr lang="en-US" altLang="zh-TW"/>
               <a:t>Click to edit Master title style</a:t>
             </a:r>
             <a:endParaRPr lang="zh-TW" altLang="en-US"/>
@@ -2076,73 +2110,73 @@
         </p:nvSpPr>
         <p:spPr>
           <a:xfrm>
-            <a:off x="3575050" y="204788"/>
-            <a:ext cx="5111750" cy="4389835"/>
+            <a:off x="4766733" y="273053"/>
+            <a:ext cx="6815667" cy="5853113"/>
           </a:xfrm>
         </p:spPr>
         <p:txBody>
           <a:bodyPr/>
           <a:lstStyle>
             <a:lvl1pPr>
-              <a:defRPr sz="3200"/>
+              <a:defRPr sz="4267"/>
             </a:lvl1pPr>
             <a:lvl2pPr>
-              <a:defRPr sz="2800"/>
+              <a:defRPr sz="3733"/>
             </a:lvl2pPr>
             <a:lvl3pPr>
-              <a:defRPr sz="2400"/>
+              <a:defRPr sz="3200"/>
             </a:lvl3pPr>
             <a:lvl4pPr>
-              <a:defRPr sz="2000"/>
+              <a:defRPr sz="2667"/>
             </a:lvl4pPr>
             <a:lvl5pPr>
-              <a:defRPr sz="2000"/>
+              <a:defRPr sz="2667"/>
             </a:lvl5pPr>
             <a:lvl6pPr>
-              <a:defRPr sz="2000"/>
+              <a:defRPr sz="2667"/>
             </a:lvl6pPr>
             <a:lvl7pPr>
-              <a:defRPr sz="2000"/>
+              <a:defRPr sz="2667"/>
             </a:lvl7pPr>
             <a:lvl8pPr>
-              <a:defRPr sz="2000"/>
+              <a:defRPr sz="2667"/>
             </a:lvl8pPr>
             <a:lvl9pPr>
-              <a:defRPr sz="2000"/>
+              <a:defRPr sz="2667"/>
             </a:lvl9pPr>
           </a:lstStyle>
           <a:p>
             <a:pPr lvl="0"/>
             <a:r>
-              <a:rPr lang="en-US" altLang="zh-TW" smtClean="0"/>
+              <a:rPr lang="en-US" altLang="zh-TW"/>
               <a:t>Click to edit Master text styles</a:t>
             </a:r>
           </a:p>
           <a:p>
             <a:pPr lvl="1"/>
             <a:r>
-              <a:rPr lang="en-US" altLang="zh-TW" smtClean="0"/>
+              <a:rPr lang="en-US" altLang="zh-TW"/>
               <a:t>Second level</a:t>
             </a:r>
           </a:p>
           <a:p>
             <a:pPr lvl="2"/>
             <a:r>
-              <a:rPr lang="en-US" altLang="zh-TW" smtClean="0"/>
+              <a:rPr lang="en-US" altLang="zh-TW"/>
               <a:t>Third level</a:t>
             </a:r>
           </a:p>
           <a:p>
             <a:pPr lvl="3"/>
             <a:r>
-              <a:rPr lang="en-US" altLang="zh-TW" smtClean="0"/>
+              <a:rPr lang="en-US" altLang="zh-TW"/>
               <a:t>Fourth level</a:t>
             </a:r>
           </a:p>
           <a:p>
             <a:pPr lvl="4"/>
             <a:r>
-              <a:rPr lang="en-US" altLang="zh-TW" smtClean="0"/>
+              <a:rPr lang="en-US" altLang="zh-TW"/>
               <a:t>Fifth level</a:t>
             </a:r>
             <a:endParaRPr lang="zh-TW" altLang="en-US"/>
@@ -2161,8 +2195,8 @@
         </p:nvSpPr>
         <p:spPr>
           <a:xfrm>
-            <a:off x="457201" y="1076326"/>
-            <a:ext cx="3008313" cy="3518297"/>
+            <a:off x="609603" y="1435103"/>
+            <a:ext cx="4011084" cy="4691063"/>
           </a:xfrm>
         </p:spPr>
         <p:txBody>
@@ -2170,45 +2204,45 @@
           <a:lstStyle>
             <a:lvl1pPr marL="0" indent="0">
               <a:buNone/>
-              <a:defRPr sz="1400"/>
+              <a:defRPr sz="1867"/>
             </a:lvl1pPr>
-            <a:lvl2pPr marL="457200" indent="0">
+            <a:lvl2pPr marL="609585" indent="0">
+              <a:buNone/>
+              <a:defRPr sz="1600"/>
+            </a:lvl2pPr>
+            <a:lvl3pPr marL="1219170" indent="0">
+              <a:buNone/>
+              <a:defRPr sz="1333"/>
+            </a:lvl3pPr>
+            <a:lvl4pPr marL="1828754" indent="0">
               <a:buNone/>
               <a:defRPr sz="1200"/>
-            </a:lvl2pPr>
-            <a:lvl3pPr marL="914400" indent="0">
-              <a:buNone/>
-              <a:defRPr sz="1000"/>
-            </a:lvl3pPr>
-            <a:lvl4pPr marL="1371600" indent="0">
-              <a:buNone/>
-              <a:defRPr sz="900"/>
             </a:lvl4pPr>
-            <a:lvl5pPr marL="1828800" indent="0">
-              <a:buNone/>
-              <a:defRPr sz="900"/>
+            <a:lvl5pPr marL="2438339" indent="0">
+              <a:buNone/>
+              <a:defRPr sz="1200"/>
             </a:lvl5pPr>
-            <a:lvl6pPr marL="2286000" indent="0">
-              <a:buNone/>
-              <a:defRPr sz="900"/>
+            <a:lvl6pPr marL="3047924" indent="0">
+              <a:buNone/>
+              <a:defRPr sz="1200"/>
             </a:lvl6pPr>
-            <a:lvl7pPr marL="2743200" indent="0">
-              <a:buNone/>
-              <a:defRPr sz="900"/>
+            <a:lvl7pPr marL="3657509" indent="0">
+              <a:buNone/>
+              <a:defRPr sz="1200"/>
             </a:lvl7pPr>
-            <a:lvl8pPr marL="3200400" indent="0">
-              <a:buNone/>
-              <a:defRPr sz="900"/>
+            <a:lvl8pPr marL="4267093" indent="0">
+              <a:buNone/>
+              <a:defRPr sz="1200"/>
             </a:lvl8pPr>
-            <a:lvl9pPr marL="3657600" indent="0">
-              <a:buNone/>
-              <a:defRPr sz="900"/>
+            <a:lvl9pPr marL="4876678" indent="0">
+              <a:buNone/>
+              <a:defRPr sz="1200"/>
             </a:lvl9pPr>
           </a:lstStyle>
           <a:p>
             <a:pPr lvl="0"/>
             <a:r>
-              <a:rPr lang="en-US" altLang="zh-TW" smtClean="0"/>
+              <a:rPr lang="en-US" altLang="zh-TW"/>
               <a:t>Click to edit Master text styles</a:t>
             </a:r>
           </a:p>
@@ -2229,11 +2263,11 @@
           <a:bodyPr/>
           <a:lstStyle/>
           <a:p>
-            <a:fld id="{515656C6-E7D2-458B-8896-20BCCA86C4C9}" type="datetimeFigureOut">
-              <a:rPr lang="zh-TW" altLang="en-US" smtClean="0"/>
-              <a:t>2023/11/11</a:t>
+            <a:fld id="{1C488704-7058-4526-95CD-2A163221AB6F}" type="datetimeFigureOut">
+              <a:rPr lang="en-US" smtClean="0"/>
+              <a:t>11/7/2025</a:t>
             </a:fld>
-            <a:endParaRPr lang="zh-TW" altLang="en-US"/>
+            <a:endParaRPr lang="en-US"/>
           </a:p>
         </p:txBody>
       </p:sp>
@@ -2252,7 +2286,7 @@
           <a:bodyPr/>
           <a:lstStyle/>
           <a:p>
-            <a:endParaRPr lang="zh-TW" altLang="en-US"/>
+            <a:endParaRPr lang="en-US"/>
           </a:p>
         </p:txBody>
       </p:sp>
@@ -2271,15 +2305,20 @@
           <a:bodyPr/>
           <a:lstStyle/>
           <a:p>
-            <a:fld id="{7470AEE8-56DC-433A-95CF-DC8F390BF088}" type="slidenum">
-              <a:rPr lang="zh-TW" altLang="en-US" smtClean="0"/>
+            <a:fld id="{DC3A5D6F-BA08-4060-B078-EDC13354B14A}" type="slidenum">
+              <a:rPr lang="en-US" smtClean="0"/>
               <a:t>‹#›</a:t>
             </a:fld>
-            <a:endParaRPr lang="zh-TW" altLang="en-US"/>
+            <a:endParaRPr lang="en-US"/>
           </a:p>
         </p:txBody>
       </p:sp>
     </p:spTree>
+    <p:extLst>
+      <p:ext uri="{BB962C8B-B14F-4D97-AF65-F5344CB8AC3E}">
+        <p14:creationId xmlns:p14="http://schemas.microsoft.com/office/powerpoint/2010/main" val="3033255275"/>
+      </p:ext>
+    </p:extLst>
   </p:cSld>
   <p:clrMapOvr>
     <a:masterClrMapping/>
@@ -2316,20 +2355,20 @@
         </p:nvSpPr>
         <p:spPr>
           <a:xfrm>
-            <a:off x="1792288" y="3600450"/>
-            <a:ext cx="5486400" cy="425054"/>
+            <a:off x="2389717" y="4800601"/>
+            <a:ext cx="7315200" cy="566739"/>
           </a:xfrm>
         </p:spPr>
         <p:txBody>
           <a:bodyPr anchor="b"/>
           <a:lstStyle>
             <a:lvl1pPr algn="l">
-              <a:defRPr sz="2000" b="1"/>
+              <a:defRPr sz="2667" b="1"/>
             </a:lvl1pPr>
           </a:lstStyle>
           <a:p>
             <a:r>
-              <a:rPr lang="en-US" altLang="zh-TW" smtClean="0"/>
+              <a:rPr lang="en-US" altLang="zh-TW"/>
               <a:t>Click to edit Master title style</a:t>
             </a:r>
             <a:endParaRPr lang="zh-TW" altLang="en-US"/>
@@ -2348,8 +2387,8 @@
         </p:nvSpPr>
         <p:spPr>
           <a:xfrm>
-            <a:off x="1792288" y="459581"/>
-            <a:ext cx="5486400" cy="3086100"/>
+            <a:off x="2389717" y="612775"/>
+            <a:ext cx="7315200" cy="4114800"/>
           </a:xfrm>
         </p:spPr>
         <p:txBody>
@@ -2357,44 +2396,44 @@
           <a:lstStyle>
             <a:lvl1pPr marL="0" indent="0">
               <a:buNone/>
+              <a:defRPr sz="4267"/>
+            </a:lvl1pPr>
+            <a:lvl2pPr marL="609585" indent="0">
+              <a:buNone/>
+              <a:defRPr sz="3733"/>
+            </a:lvl2pPr>
+            <a:lvl3pPr marL="1219170" indent="0">
+              <a:buNone/>
               <a:defRPr sz="3200"/>
-            </a:lvl1pPr>
-            <a:lvl2pPr marL="457200" indent="0">
-              <a:buNone/>
-              <a:defRPr sz="2800"/>
-            </a:lvl2pPr>
-            <a:lvl3pPr marL="914400" indent="0">
-              <a:buNone/>
-              <a:defRPr sz="2400"/>
             </a:lvl3pPr>
-            <a:lvl4pPr marL="1371600" indent="0">
-              <a:buNone/>
-              <a:defRPr sz="2000"/>
+            <a:lvl4pPr marL="1828754" indent="0">
+              <a:buNone/>
+              <a:defRPr sz="2667"/>
             </a:lvl4pPr>
-            <a:lvl5pPr marL="1828800" indent="0">
-              <a:buNone/>
-              <a:defRPr sz="2000"/>
+            <a:lvl5pPr marL="2438339" indent="0">
+              <a:buNone/>
+              <a:defRPr sz="2667"/>
             </a:lvl5pPr>
-            <a:lvl6pPr marL="2286000" indent="0">
-              <a:buNone/>
-              <a:defRPr sz="2000"/>
+            <a:lvl6pPr marL="3047924" indent="0">
+              <a:buNone/>
+              <a:defRPr sz="2667"/>
             </a:lvl6pPr>
-            <a:lvl7pPr marL="2743200" indent="0">
-              <a:buNone/>
-              <a:defRPr sz="2000"/>
+            <a:lvl7pPr marL="3657509" indent="0">
+              <a:buNone/>
+              <a:defRPr sz="2667"/>
             </a:lvl7pPr>
-            <a:lvl8pPr marL="3200400" indent="0">
-              <a:buNone/>
-              <a:defRPr sz="2000"/>
+            <a:lvl8pPr marL="4267093" indent="0">
+              <a:buNone/>
+              <a:defRPr sz="2667"/>
             </a:lvl8pPr>
-            <a:lvl9pPr marL="3657600" indent="0">
-              <a:buNone/>
-              <a:defRPr sz="2000"/>
+            <a:lvl9pPr marL="4876678" indent="0">
+              <a:buNone/>
+              <a:defRPr sz="2667"/>
             </a:lvl9pPr>
           </a:lstStyle>
           <a:p>
             <a:r>
-              <a:rPr lang="en-US" altLang="zh-TW" smtClean="0"/>
+              <a:rPr lang="en-US" altLang="zh-TW"/>
               <a:t>Click icon to add picture</a:t>
             </a:r>
             <a:endParaRPr lang="zh-TW" altLang="en-US"/>
@@ -2413,8 +2452,8 @@
         </p:nvSpPr>
         <p:spPr>
           <a:xfrm>
-            <a:off x="1792288" y="4025503"/>
-            <a:ext cx="5486400" cy="603647"/>
+            <a:off x="2389717" y="5367339"/>
+            <a:ext cx="7315200" cy="804863"/>
           </a:xfrm>
         </p:spPr>
         <p:txBody>
@@ -2422,45 +2461,45 @@
           <a:lstStyle>
             <a:lvl1pPr marL="0" indent="0">
               <a:buNone/>
-              <a:defRPr sz="1400"/>
+              <a:defRPr sz="1867"/>
             </a:lvl1pPr>
-            <a:lvl2pPr marL="457200" indent="0">
+            <a:lvl2pPr marL="609585" indent="0">
+              <a:buNone/>
+              <a:defRPr sz="1600"/>
+            </a:lvl2pPr>
+            <a:lvl3pPr marL="1219170" indent="0">
+              <a:buNone/>
+              <a:defRPr sz="1333"/>
+            </a:lvl3pPr>
+            <a:lvl4pPr marL="1828754" indent="0">
               <a:buNone/>
               <a:defRPr sz="1200"/>
-            </a:lvl2pPr>
-            <a:lvl3pPr marL="914400" indent="0">
-              <a:buNone/>
-              <a:defRPr sz="1000"/>
-            </a:lvl3pPr>
-            <a:lvl4pPr marL="1371600" indent="0">
-              <a:buNone/>
-              <a:defRPr sz="900"/>
             </a:lvl4pPr>
-            <a:lvl5pPr marL="1828800" indent="0">
-              <a:buNone/>
-              <a:defRPr sz="900"/>
+            <a:lvl5pPr marL="2438339" indent="0">
+              <a:buNone/>
+              <a:defRPr sz="1200"/>
             </a:lvl5pPr>
-            <a:lvl6pPr marL="2286000" indent="0">
-              <a:buNone/>
-              <a:defRPr sz="900"/>
+            <a:lvl6pPr marL="3047924" indent="0">
+              <a:buNone/>
+              <a:defRPr sz="1200"/>
             </a:lvl6pPr>
-            <a:lvl7pPr marL="2743200" indent="0">
-              <a:buNone/>
-              <a:defRPr sz="900"/>
+            <a:lvl7pPr marL="3657509" indent="0">
+              <a:buNone/>
+              <a:defRPr sz="1200"/>
             </a:lvl7pPr>
-            <a:lvl8pPr marL="3200400" indent="0">
-              <a:buNone/>
-              <a:defRPr sz="900"/>
+            <a:lvl8pPr marL="4267093" indent="0">
+              <a:buNone/>
+              <a:defRPr sz="1200"/>
             </a:lvl8pPr>
-            <a:lvl9pPr marL="3657600" indent="0">
-              <a:buNone/>
-              <a:defRPr sz="900"/>
+            <a:lvl9pPr marL="4876678" indent="0">
+              <a:buNone/>
+              <a:defRPr sz="1200"/>
             </a:lvl9pPr>
           </a:lstStyle>
           <a:p>
             <a:pPr lvl="0"/>
             <a:r>
-              <a:rPr lang="en-US" altLang="zh-TW" smtClean="0"/>
+              <a:rPr lang="en-US" altLang="zh-TW"/>
               <a:t>Click to edit Master text styles</a:t>
             </a:r>
           </a:p>
@@ -2481,11 +2520,11 @@
           <a:bodyPr/>
           <a:lstStyle/>
           <a:p>
-            <a:fld id="{515656C6-E7D2-458B-8896-20BCCA86C4C9}" type="datetimeFigureOut">
-              <a:rPr lang="zh-TW" altLang="en-US" smtClean="0"/>
-              <a:t>2023/11/11</a:t>
+            <a:fld id="{1C488704-7058-4526-95CD-2A163221AB6F}" type="datetimeFigureOut">
+              <a:rPr lang="en-US" smtClean="0"/>
+              <a:t>11/7/2025</a:t>
             </a:fld>
-            <a:endParaRPr lang="zh-TW" altLang="en-US"/>
+            <a:endParaRPr lang="en-US"/>
           </a:p>
         </p:txBody>
       </p:sp>
@@ -2504,7 +2543,7 @@
           <a:bodyPr/>
           <a:lstStyle/>
           <a:p>
-            <a:endParaRPr lang="zh-TW" altLang="en-US"/>
+            <a:endParaRPr lang="en-US"/>
           </a:p>
         </p:txBody>
       </p:sp>
@@ -2523,15 +2562,20 @@
           <a:bodyPr/>
           <a:lstStyle/>
           <a:p>
-            <a:fld id="{7470AEE8-56DC-433A-95CF-DC8F390BF088}" type="slidenum">
-              <a:rPr lang="zh-TW" altLang="en-US" smtClean="0"/>
+            <a:fld id="{DC3A5D6F-BA08-4060-B078-EDC13354B14A}" type="slidenum">
+              <a:rPr lang="en-US" smtClean="0"/>
               <a:t>‹#›</a:t>
             </a:fld>
-            <a:endParaRPr lang="zh-TW" altLang="en-US"/>
+            <a:endParaRPr lang="en-US"/>
           </a:p>
         </p:txBody>
       </p:sp>
     </p:spTree>
+    <p:extLst>
+      <p:ext uri="{BB962C8B-B14F-4D97-AF65-F5344CB8AC3E}">
+        <p14:creationId xmlns:p14="http://schemas.microsoft.com/office/powerpoint/2010/main" val="3304836746"/>
+      </p:ext>
+    </p:extLst>
   </p:cSld>
   <p:clrMapOvr>
     <a:masterClrMapping/>
@@ -2578,8 +2622,8 @@
         </p:nvSpPr>
         <p:spPr>
           <a:xfrm>
-            <a:off x="457200" y="205979"/>
-            <a:ext cx="8229600" cy="857250"/>
+            <a:off x="609600" y="274637"/>
+            <a:ext cx="10972800" cy="1143000"/>
           </a:xfrm>
           <a:prstGeom prst="rect">
             <a:avLst/>
@@ -2592,10 +2636,9 @@
           <a:lstStyle/>
           <a:p>
             <a:r>
-              <a:rPr lang="zh-TW" altLang="en-US" smtClean="0"/>
+              <a:rPr lang="zh-TW" altLang="en-US"/>
               <a:t>按一下以編輯母片標題樣式</a:t>
             </a:r>
-            <a:endParaRPr lang="zh-TW" altLang="en-US"/>
           </a:p>
         </p:txBody>
       </p:sp>
@@ -2611,8 +2654,8 @@
         </p:nvSpPr>
         <p:spPr>
           <a:xfrm>
-            <a:off x="457200" y="1200151"/>
-            <a:ext cx="8229600" cy="3394472"/>
+            <a:off x="609600" y="1600201"/>
+            <a:ext cx="10972800" cy="4525963"/>
           </a:xfrm>
           <a:prstGeom prst="rect">
             <a:avLst/>
@@ -2626,38 +2669,37 @@
           <a:p>
             <a:pPr lvl="0"/>
             <a:r>
-              <a:rPr lang="zh-TW" altLang="en-US" smtClean="0"/>
+              <a:rPr lang="zh-TW" altLang="en-US"/>
               <a:t>按一下以編輯母片文字樣式</a:t>
             </a:r>
           </a:p>
           <a:p>
             <a:pPr lvl="1"/>
             <a:r>
-              <a:rPr lang="zh-TW" altLang="en-US" smtClean="0"/>
+              <a:rPr lang="zh-TW" altLang="en-US"/>
               <a:t>第二層</a:t>
             </a:r>
           </a:p>
           <a:p>
             <a:pPr lvl="2"/>
             <a:r>
-              <a:rPr lang="zh-TW" altLang="en-US" smtClean="0"/>
+              <a:rPr lang="zh-TW" altLang="en-US"/>
               <a:t>第三層</a:t>
             </a:r>
           </a:p>
           <a:p>
             <a:pPr lvl="3"/>
             <a:r>
-              <a:rPr lang="zh-TW" altLang="en-US" smtClean="0"/>
+              <a:rPr lang="zh-TW" altLang="en-US"/>
               <a:t>第四層</a:t>
             </a:r>
           </a:p>
           <a:p>
             <a:pPr lvl="4"/>
             <a:r>
-              <a:rPr lang="zh-TW" altLang="en-US" smtClean="0"/>
+              <a:rPr lang="zh-TW" altLang="en-US"/>
               <a:t>第五層</a:t>
             </a:r>
-            <a:endParaRPr lang="zh-TW" altLang="en-US"/>
           </a:p>
         </p:txBody>
       </p:sp>
@@ -2673,8 +2715,8 @@
         </p:nvSpPr>
         <p:spPr>
           <a:xfrm>
-            <a:off x="457200" y="4767263"/>
-            <a:ext cx="2133600" cy="273844"/>
+            <a:off x="609600" y="6356352"/>
+            <a:ext cx="2844800" cy="365125"/>
           </a:xfrm>
           <a:prstGeom prst="rect">
             <a:avLst/>
@@ -2684,7 +2726,7 @@
           <a:bodyPr vert="horz" lIns="91440" tIns="45720" rIns="91440" bIns="45720" rtlCol="0" anchor="ctr"/>
           <a:lstStyle>
             <a:lvl1pPr algn="l">
-              <a:defRPr sz="1200">
+              <a:defRPr sz="1600">
                 <a:solidFill>
                   <a:schemeClr val="tx1">
                     <a:tint val="75000"/>
@@ -2694,11 +2736,11 @@
             </a:lvl1pPr>
           </a:lstStyle>
           <a:p>
-            <a:fld id="{515656C6-E7D2-458B-8896-20BCCA86C4C9}" type="datetimeFigureOut">
-              <a:rPr lang="zh-TW" altLang="en-US" smtClean="0"/>
-              <a:t>2023/11/11</a:t>
+            <a:fld id="{1C488704-7058-4526-95CD-2A163221AB6F}" type="datetimeFigureOut">
+              <a:rPr lang="en-US" smtClean="0"/>
+              <a:t>11/7/2025</a:t>
             </a:fld>
-            <a:endParaRPr lang="zh-TW" altLang="en-US"/>
+            <a:endParaRPr lang="en-US"/>
           </a:p>
         </p:txBody>
       </p:sp>
@@ -2714,8 +2756,8 @@
         </p:nvSpPr>
         <p:spPr>
           <a:xfrm>
-            <a:off x="3124200" y="4767263"/>
-            <a:ext cx="2895600" cy="273844"/>
+            <a:off x="4165600" y="6356352"/>
+            <a:ext cx="3860800" cy="365125"/>
           </a:xfrm>
           <a:prstGeom prst="rect">
             <a:avLst/>
@@ -2725,7 +2767,7 @@
           <a:bodyPr vert="horz" lIns="91440" tIns="45720" rIns="91440" bIns="45720" rtlCol="0" anchor="ctr"/>
           <a:lstStyle>
             <a:lvl1pPr algn="ctr">
-              <a:defRPr sz="1200">
+              <a:defRPr sz="1600">
                 <a:solidFill>
                   <a:schemeClr val="tx1">
                     <a:tint val="75000"/>
@@ -2735,7 +2777,7 @@
             </a:lvl1pPr>
           </a:lstStyle>
           <a:p>
-            <a:endParaRPr lang="zh-TW" altLang="en-US"/>
+            <a:endParaRPr lang="en-US"/>
           </a:p>
         </p:txBody>
       </p:sp>
@@ -2751,8 +2793,8 @@
         </p:nvSpPr>
         <p:spPr>
           <a:xfrm>
-            <a:off x="6553200" y="4767263"/>
-            <a:ext cx="2133600" cy="273844"/>
+            <a:off x="8737600" y="6356352"/>
+            <a:ext cx="2844800" cy="365125"/>
           </a:xfrm>
           <a:prstGeom prst="rect">
             <a:avLst/>
@@ -2762,7 +2804,7 @@
           <a:bodyPr vert="horz" lIns="91440" tIns="45720" rIns="91440" bIns="45720" rtlCol="0" anchor="ctr"/>
           <a:lstStyle>
             <a:lvl1pPr algn="r">
-              <a:defRPr sz="1200">
+              <a:defRPr sz="1600">
                 <a:solidFill>
                   <a:schemeClr val="tx1">
                     <a:tint val="75000"/>
@@ -2772,15 +2814,20 @@
             </a:lvl1pPr>
           </a:lstStyle>
           <a:p>
-            <a:fld id="{7470AEE8-56DC-433A-95CF-DC8F390BF088}" type="slidenum">
-              <a:rPr lang="zh-TW" altLang="en-US" smtClean="0"/>
+            <a:fld id="{DC3A5D6F-BA08-4060-B078-EDC13354B14A}" type="slidenum">
+              <a:rPr lang="en-US" smtClean="0"/>
               <a:t>‹#›</a:t>
             </a:fld>
-            <a:endParaRPr lang="zh-TW" altLang="en-US"/>
+            <a:endParaRPr lang="en-US"/>
           </a:p>
         </p:txBody>
       </p:sp>
     </p:spTree>
+    <p:extLst>
+      <p:ext uri="{BB962C8B-B14F-4D97-AF65-F5344CB8AC3E}">
+        <p14:creationId xmlns:p14="http://schemas.microsoft.com/office/powerpoint/2010/main" val="3155821109"/>
+      </p:ext>
+    </p:extLst>
   </p:cSld>
   <p:clrMap bg1="lt1" tx1="dk1" bg2="lt2" tx2="dk2" accent1="accent1" accent2="accent2" accent3="accent3" accent4="accent4" accent5="accent5" accent6="accent6" hlink="hlink" folHlink="folHlink"/>
   <p:sldLayoutIdLst>
@@ -2798,12 +2845,12 @@
   </p:sldLayoutIdLst>
   <p:txStyles>
     <p:titleStyle>
-      <a:lvl1pPr algn="ctr" defTabSz="914400" rtl="0" eaLnBrk="1" latinLnBrk="0" hangingPunct="1">
+      <a:lvl1pPr algn="ctr" defTabSz="1219170" rtl="0" eaLnBrk="1" latinLnBrk="0" hangingPunct="1">
         <a:spcBef>
           <a:spcPct val="0"/>
         </a:spcBef>
         <a:buNone/>
-        <a:defRPr sz="4400" kern="1200">
+        <a:defRPr sz="5867" kern="1200">
           <a:solidFill>
             <a:schemeClr val="tx1"/>
           </a:solidFill>
@@ -2814,11 +2861,41 @@
       </a:lvl1pPr>
     </p:titleStyle>
     <p:bodyStyle>
-      <a:lvl1pPr marL="342900" indent="-342900" algn="l" defTabSz="914400" rtl="0" eaLnBrk="1" latinLnBrk="0" hangingPunct="1">
+      <a:lvl1pPr marL="457189" indent="-457189" algn="l" defTabSz="1219170" rtl="0" eaLnBrk="1" latinLnBrk="0" hangingPunct="1">
         <a:spcBef>
           <a:spcPct val="20000"/>
         </a:spcBef>
-        <a:buFont typeface="Arial" pitchFamily="34" charset="0"/>
+        <a:buFont typeface="Arial" panose="02080604020202020204" pitchFamily="34" charset="0"/>
+        <a:buChar char="•"/>
+        <a:defRPr sz="4267" kern="1200">
+          <a:solidFill>
+            <a:schemeClr val="tx1"/>
+          </a:solidFill>
+          <a:latin typeface="+mn-lt"/>
+          <a:ea typeface="+mn-ea"/>
+          <a:cs typeface="+mn-cs"/>
+        </a:defRPr>
+      </a:lvl1pPr>
+      <a:lvl2pPr marL="990575" indent="-380990" algn="l" defTabSz="1219170" rtl="0" eaLnBrk="1" latinLnBrk="0" hangingPunct="1">
+        <a:spcBef>
+          <a:spcPct val="20000"/>
+        </a:spcBef>
+        <a:buFont typeface="Arial" panose="02080604020202020204" pitchFamily="34" charset="0"/>
+        <a:buChar char="–"/>
+        <a:defRPr sz="3733" kern="1200">
+          <a:solidFill>
+            <a:schemeClr val="tx1"/>
+          </a:solidFill>
+          <a:latin typeface="+mn-lt"/>
+          <a:ea typeface="+mn-ea"/>
+          <a:cs typeface="+mn-cs"/>
+        </a:defRPr>
+      </a:lvl2pPr>
+      <a:lvl3pPr marL="1523962" indent="-304792" algn="l" defTabSz="1219170" rtl="0" eaLnBrk="1" latinLnBrk="0" hangingPunct="1">
+        <a:spcBef>
+          <a:spcPct val="20000"/>
+        </a:spcBef>
+        <a:buFont typeface="Arial" panose="02080604020202020204" pitchFamily="34" charset="0"/>
         <a:buChar char="•"/>
         <a:defRPr sz="3200" kern="1200">
           <a:solidFill>
@@ -2828,44 +2905,14 @@
           <a:ea typeface="+mn-ea"/>
           <a:cs typeface="+mn-cs"/>
         </a:defRPr>
-      </a:lvl1pPr>
-      <a:lvl2pPr marL="742950" indent="-285750" algn="l" defTabSz="914400" rtl="0" eaLnBrk="1" latinLnBrk="0" hangingPunct="1">
+      </a:lvl3pPr>
+      <a:lvl4pPr marL="2133547" indent="-304792" algn="l" defTabSz="1219170" rtl="0" eaLnBrk="1" latinLnBrk="0" hangingPunct="1">
         <a:spcBef>
           <a:spcPct val="20000"/>
         </a:spcBef>
-        <a:buFont typeface="Arial" pitchFamily="34" charset="0"/>
+        <a:buFont typeface="Arial" panose="02080604020202020204" pitchFamily="34" charset="0"/>
         <a:buChar char="–"/>
-        <a:defRPr sz="2800" kern="1200">
-          <a:solidFill>
-            <a:schemeClr val="tx1"/>
-          </a:solidFill>
-          <a:latin typeface="+mn-lt"/>
-          <a:ea typeface="+mn-ea"/>
-          <a:cs typeface="+mn-cs"/>
-        </a:defRPr>
-      </a:lvl2pPr>
-      <a:lvl3pPr marL="1143000" indent="-228600" algn="l" defTabSz="914400" rtl="0" eaLnBrk="1" latinLnBrk="0" hangingPunct="1">
-        <a:spcBef>
-          <a:spcPct val="20000"/>
-        </a:spcBef>
-        <a:buFont typeface="Arial" pitchFamily="34" charset="0"/>
-        <a:buChar char="•"/>
-        <a:defRPr sz="2400" kern="1200">
-          <a:solidFill>
-            <a:schemeClr val="tx1"/>
-          </a:solidFill>
-          <a:latin typeface="+mn-lt"/>
-          <a:ea typeface="+mn-ea"/>
-          <a:cs typeface="+mn-cs"/>
-        </a:defRPr>
-      </a:lvl3pPr>
-      <a:lvl4pPr marL="1600200" indent="-228600" algn="l" defTabSz="914400" rtl="0" eaLnBrk="1" latinLnBrk="0" hangingPunct="1">
-        <a:spcBef>
-          <a:spcPct val="20000"/>
-        </a:spcBef>
-        <a:buFont typeface="Arial" pitchFamily="34" charset="0"/>
-        <a:buChar char="–"/>
-        <a:defRPr sz="2000" kern="1200">
+        <a:defRPr sz="2667" kern="1200">
           <a:solidFill>
             <a:schemeClr val="tx1"/>
           </a:solidFill>
@@ -2874,13 +2921,13 @@
           <a:cs typeface="+mn-cs"/>
         </a:defRPr>
       </a:lvl4pPr>
-      <a:lvl5pPr marL="2057400" indent="-228600" algn="l" defTabSz="914400" rtl="0" eaLnBrk="1" latinLnBrk="0" hangingPunct="1">
+      <a:lvl5pPr marL="2743131" indent="-304792" algn="l" defTabSz="1219170" rtl="0" eaLnBrk="1" latinLnBrk="0" hangingPunct="1">
         <a:spcBef>
           <a:spcPct val="20000"/>
         </a:spcBef>
-        <a:buFont typeface="Arial" pitchFamily="34" charset="0"/>
+        <a:buFont typeface="Arial" panose="02080604020202020204" pitchFamily="34" charset="0"/>
         <a:buChar char="»"/>
-        <a:defRPr sz="2000" kern="1200">
+        <a:defRPr sz="2667" kern="1200">
           <a:solidFill>
             <a:schemeClr val="tx1"/>
           </a:solidFill>
@@ -2889,13 +2936,13 @@
           <a:cs typeface="+mn-cs"/>
         </a:defRPr>
       </a:lvl5pPr>
-      <a:lvl6pPr marL="2514600" indent="-228600" algn="l" defTabSz="914400" rtl="0" eaLnBrk="1" latinLnBrk="0" hangingPunct="1">
+      <a:lvl6pPr marL="3352716" indent="-304792" algn="l" defTabSz="1219170" rtl="0" eaLnBrk="1" latinLnBrk="0" hangingPunct="1">
         <a:spcBef>
           <a:spcPct val="20000"/>
         </a:spcBef>
-        <a:buFont typeface="Arial" pitchFamily="34" charset="0"/>
+        <a:buFont typeface="Arial" panose="02080604020202020204" pitchFamily="34" charset="0"/>
         <a:buChar char="•"/>
-        <a:defRPr sz="2000" kern="1200">
+        <a:defRPr sz="2667" kern="1200">
           <a:solidFill>
             <a:schemeClr val="tx1"/>
           </a:solidFill>
@@ -2904,13 +2951,13 @@
           <a:cs typeface="+mn-cs"/>
         </a:defRPr>
       </a:lvl6pPr>
-      <a:lvl7pPr marL="2971800" indent="-228600" algn="l" defTabSz="914400" rtl="0" eaLnBrk="1" latinLnBrk="0" hangingPunct="1">
+      <a:lvl7pPr marL="3962301" indent="-304792" algn="l" defTabSz="1219170" rtl="0" eaLnBrk="1" latinLnBrk="0" hangingPunct="1">
         <a:spcBef>
           <a:spcPct val="20000"/>
         </a:spcBef>
-        <a:buFont typeface="Arial" pitchFamily="34" charset="0"/>
+        <a:buFont typeface="Arial" panose="02080604020202020204" pitchFamily="34" charset="0"/>
         <a:buChar char="•"/>
-        <a:defRPr sz="2000" kern="1200">
+        <a:defRPr sz="2667" kern="1200">
           <a:solidFill>
             <a:schemeClr val="tx1"/>
           </a:solidFill>
@@ -2919,13 +2966,13 @@
           <a:cs typeface="+mn-cs"/>
         </a:defRPr>
       </a:lvl7pPr>
-      <a:lvl8pPr marL="3429000" indent="-228600" algn="l" defTabSz="914400" rtl="0" eaLnBrk="1" latinLnBrk="0" hangingPunct="1">
+      <a:lvl8pPr marL="4571886" indent="-304792" algn="l" defTabSz="1219170" rtl="0" eaLnBrk="1" latinLnBrk="0" hangingPunct="1">
         <a:spcBef>
           <a:spcPct val="20000"/>
         </a:spcBef>
-        <a:buFont typeface="Arial" pitchFamily="34" charset="0"/>
+        <a:buFont typeface="Arial" panose="02080604020202020204" pitchFamily="34" charset="0"/>
         <a:buChar char="•"/>
-        <a:defRPr sz="2000" kern="1200">
+        <a:defRPr sz="2667" kern="1200">
           <a:solidFill>
             <a:schemeClr val="tx1"/>
           </a:solidFill>
@@ -2934,13 +2981,13 @@
           <a:cs typeface="+mn-cs"/>
         </a:defRPr>
       </a:lvl8pPr>
-      <a:lvl9pPr marL="3886200" indent="-228600" algn="l" defTabSz="914400" rtl="0" eaLnBrk="1" latinLnBrk="0" hangingPunct="1">
+      <a:lvl9pPr marL="5181470" indent="-304792" algn="l" defTabSz="1219170" rtl="0" eaLnBrk="1" latinLnBrk="0" hangingPunct="1">
         <a:spcBef>
           <a:spcPct val="20000"/>
         </a:spcBef>
-        <a:buFont typeface="Arial" pitchFamily="34" charset="0"/>
+        <a:buFont typeface="Arial" panose="02080604020202020204" pitchFamily="34" charset="0"/>
         <a:buChar char="•"/>
-        <a:defRPr sz="2000" kern="1200">
+        <a:defRPr sz="2667" kern="1200">
           <a:solidFill>
             <a:schemeClr val="tx1"/>
           </a:solidFill>
@@ -2954,8 +3001,8 @@
       <a:defPPr>
         <a:defRPr lang="zh-TW"/>
       </a:defPPr>
-      <a:lvl1pPr marL="0" algn="l" defTabSz="914400" rtl="0" eaLnBrk="1" latinLnBrk="0" hangingPunct="1">
-        <a:defRPr sz="1800" kern="1200">
+      <a:lvl1pPr marL="0" algn="l" defTabSz="1219170" rtl="0" eaLnBrk="1" latinLnBrk="0" hangingPunct="1">
+        <a:defRPr sz="2400" kern="1200">
           <a:solidFill>
             <a:schemeClr val="tx1"/>
           </a:solidFill>
@@ -2964,8 +3011,8 @@
           <a:cs typeface="+mn-cs"/>
         </a:defRPr>
       </a:lvl1pPr>
-      <a:lvl2pPr marL="457200" algn="l" defTabSz="914400" rtl="0" eaLnBrk="1" latinLnBrk="0" hangingPunct="1">
-        <a:defRPr sz="1800" kern="1200">
+      <a:lvl2pPr marL="609585" algn="l" defTabSz="1219170" rtl="0" eaLnBrk="1" latinLnBrk="0" hangingPunct="1">
+        <a:defRPr sz="2400" kern="1200">
           <a:solidFill>
             <a:schemeClr val="tx1"/>
           </a:solidFill>
@@ -2974,8 +3021,8 @@
           <a:cs typeface="+mn-cs"/>
         </a:defRPr>
       </a:lvl2pPr>
-      <a:lvl3pPr marL="914400" algn="l" defTabSz="914400" rtl="0" eaLnBrk="1" latinLnBrk="0" hangingPunct="1">
-        <a:defRPr sz="1800" kern="1200">
+      <a:lvl3pPr marL="1219170" algn="l" defTabSz="1219170" rtl="0" eaLnBrk="1" latinLnBrk="0" hangingPunct="1">
+        <a:defRPr sz="2400" kern="1200">
           <a:solidFill>
             <a:schemeClr val="tx1"/>
           </a:solidFill>
@@ -2984,8 +3031,8 @@
           <a:cs typeface="+mn-cs"/>
         </a:defRPr>
       </a:lvl3pPr>
-      <a:lvl4pPr marL="1371600" algn="l" defTabSz="914400" rtl="0" eaLnBrk="1" latinLnBrk="0" hangingPunct="1">
-        <a:defRPr sz="1800" kern="1200">
+      <a:lvl4pPr marL="1828754" algn="l" defTabSz="1219170" rtl="0" eaLnBrk="1" latinLnBrk="0" hangingPunct="1">
+        <a:defRPr sz="2400" kern="1200">
           <a:solidFill>
             <a:schemeClr val="tx1"/>
           </a:solidFill>
@@ -2994,8 +3041,8 @@
           <a:cs typeface="+mn-cs"/>
         </a:defRPr>
       </a:lvl4pPr>
-      <a:lvl5pPr marL="1828800" algn="l" defTabSz="914400" rtl="0" eaLnBrk="1" latinLnBrk="0" hangingPunct="1">
-        <a:defRPr sz="1800" kern="1200">
+      <a:lvl5pPr marL="2438339" algn="l" defTabSz="1219170" rtl="0" eaLnBrk="1" latinLnBrk="0" hangingPunct="1">
+        <a:defRPr sz="2400" kern="1200">
           <a:solidFill>
             <a:schemeClr val="tx1"/>
           </a:solidFill>
@@ -3004,8 +3051,8 @@
           <a:cs typeface="+mn-cs"/>
         </a:defRPr>
       </a:lvl5pPr>
-      <a:lvl6pPr marL="2286000" algn="l" defTabSz="914400" rtl="0" eaLnBrk="1" latinLnBrk="0" hangingPunct="1">
-        <a:defRPr sz="1800" kern="1200">
+      <a:lvl6pPr marL="3047924" algn="l" defTabSz="1219170" rtl="0" eaLnBrk="1" latinLnBrk="0" hangingPunct="1">
+        <a:defRPr sz="2400" kern="1200">
           <a:solidFill>
             <a:schemeClr val="tx1"/>
           </a:solidFill>
@@ -3014,8 +3061,8 @@
           <a:cs typeface="+mn-cs"/>
         </a:defRPr>
       </a:lvl6pPr>
-      <a:lvl7pPr marL="2743200" algn="l" defTabSz="914400" rtl="0" eaLnBrk="1" latinLnBrk="0" hangingPunct="1">
-        <a:defRPr sz="1800" kern="1200">
+      <a:lvl7pPr marL="3657509" algn="l" defTabSz="1219170" rtl="0" eaLnBrk="1" latinLnBrk="0" hangingPunct="1">
+        <a:defRPr sz="2400" kern="1200">
           <a:solidFill>
             <a:schemeClr val="tx1"/>
           </a:solidFill>
@@ -3024,8 +3071,8 @@
           <a:cs typeface="+mn-cs"/>
         </a:defRPr>
       </a:lvl7pPr>
-      <a:lvl8pPr marL="3200400" algn="l" defTabSz="914400" rtl="0" eaLnBrk="1" latinLnBrk="0" hangingPunct="1">
-        <a:defRPr sz="1800" kern="1200">
+      <a:lvl8pPr marL="4267093" algn="l" defTabSz="1219170" rtl="0" eaLnBrk="1" latinLnBrk="0" hangingPunct="1">
+        <a:defRPr sz="2400" kern="1200">
           <a:solidFill>
             <a:schemeClr val="tx1"/>
           </a:solidFill>
@@ -3034,8 +3081,8 @@
           <a:cs typeface="+mn-cs"/>
         </a:defRPr>
       </a:lvl8pPr>
-      <a:lvl9pPr marL="3657600" algn="l" defTabSz="914400" rtl="0" eaLnBrk="1" latinLnBrk="0" hangingPunct="1">
-        <a:defRPr sz="1800" kern="1200">
+      <a:lvl9pPr marL="4876678" algn="l" defTabSz="1219170" rtl="0" eaLnBrk="1" latinLnBrk="0" hangingPunct="1">
+        <a:defRPr sz="2400" kern="1200">
           <a:solidFill>
             <a:schemeClr val="tx1"/>
           </a:solidFill>
@@ -3054,7 +3101,13 @@
   <p:cSld>
     <p:spTree>
       <p:nvGrpSpPr>
-        <p:cNvPr id="1" name=""/>
+        <p:cNvPr id="1" name="">
+          <a:extLst>
+            <a:ext uri="{FF2B5EF4-FFF2-40B4-BE49-F238E27FC236}">
+              <a16:creationId xmlns:a16="http://schemas.microsoft.com/office/drawing/2014/main" id="{5F20F3D7-EDDF-CE30-9060-314A88E3730B}"/>
+            </a:ext>
+          </a:extLst>
+        </p:cNvPr>
         <p:cNvGrpSpPr/>
         <p:nvPr/>
       </p:nvGrpSpPr>
@@ -3068,7 +3121,13 @@
       </p:grpSpPr>
       <p:sp>
         <p:nvSpPr>
-          <p:cNvPr id="4" name="標題 3"/>
+          <p:cNvPr id="4" name="標題 3">
+            <a:extLst>
+              <a:ext uri="{FF2B5EF4-FFF2-40B4-BE49-F238E27FC236}">
+                <a16:creationId xmlns:a16="http://schemas.microsoft.com/office/drawing/2014/main" id="{CD6A41DD-B5E6-D530-EC0F-85726817D119}"/>
+              </a:ext>
+            </a:extLst>
+          </p:cNvPr>
           <p:cNvSpPr>
             <a:spLocks noGrp="1"/>
           </p:cNvSpPr>
@@ -3078,8 +3137,8 @@
         </p:nvSpPr>
         <p:spPr>
           <a:xfrm>
-            <a:off x="0" y="2143135"/>
-            <a:ext cx="9144000" cy="857250"/>
+            <a:off x="0" y="2660915"/>
+            <a:ext cx="12192000" cy="1143000"/>
           </a:xfrm>
         </p:spPr>
         <p:txBody>
@@ -3089,7 +3148,7 @@
           <a:lstStyle/>
           <a:p>
             <a:r>
-              <a:rPr lang="zh-CN" altLang="en-US" sz="5400" b="1" i="1" dirty="0" smtClean="0">
+              <a:rPr lang="zh-TW" altLang="en-US" sz="7200" b="1" i="1" dirty="0">
                 <a:solidFill>
                   <a:srgbClr val="000066"/>
                 </a:solidFill>
@@ -3103,46 +3162,15 @@
                 <a:latin typeface="微軟正黑體" pitchFamily="34" charset="-120"/>
                 <a:ea typeface="微軟正黑體" pitchFamily="34" charset="-120"/>
               </a:rPr>
-              <a:t>謝</a:t>
-            </a:r>
-            <a:r>
-              <a:rPr lang="zh-CN" altLang="en-US" sz="5400" b="1" i="1" dirty="0">
-                <a:solidFill>
-                  <a:srgbClr val="000066"/>
-                </a:solidFill>
-                <a:effectLst>
-                  <a:outerShdw blurRad="38100" dist="38100" dir="2700000" algn="tl">
-                    <a:srgbClr val="000000">
-                      <a:alpha val="43137"/>
-                    </a:srgbClr>
-                  </a:outerShdw>
-                </a:effectLst>
-                <a:latin typeface="微軟正黑體" pitchFamily="34" charset="-120"/>
-                <a:ea typeface="微軟正黑體" pitchFamily="34" charset="-120"/>
-              </a:rPr>
-              <a:t>謝祢</a:t>
-            </a:r>
-            <a:endParaRPr lang="zh-TW" altLang="en-US" sz="5400" b="1" i="1" dirty="0">
-              <a:solidFill>
-                <a:srgbClr val="000066"/>
-              </a:solidFill>
-              <a:effectLst>
-                <a:outerShdw blurRad="38100" dist="38100" dir="2700000" algn="tl">
-                  <a:srgbClr val="000000">
-                    <a:alpha val="43137"/>
-                  </a:srgbClr>
-                </a:outerShdw>
-              </a:effectLst>
-              <a:latin typeface="微軟正黑體" pitchFamily="34" charset="-120"/>
-              <a:ea typeface="微軟正黑體" pitchFamily="34" charset="-120"/>
-            </a:endParaRPr>
+              <a:t>謝謝祢</a:t>
+            </a:r>
           </a:p>
         </p:txBody>
       </p:sp>
     </p:spTree>
     <p:extLst>
       <p:ext uri="{BB962C8B-B14F-4D97-AF65-F5344CB8AC3E}">
-        <p14:creationId xmlns:p14="http://schemas.microsoft.com/office/powerpoint/2010/main" val="1010133266"/>
+        <p14:creationId xmlns:p14="http://schemas.microsoft.com/office/powerpoint/2010/main" val="388492399"/>
       </p:ext>
     </p:extLst>
   </p:cSld>
@@ -3157,7 +3185,13 @@
   <p:cSld>
     <p:spTree>
       <p:nvGrpSpPr>
-        <p:cNvPr id="1" name=""/>
+        <p:cNvPr id="1" name="">
+          <a:extLst>
+            <a:ext uri="{FF2B5EF4-FFF2-40B4-BE49-F238E27FC236}">
+              <a16:creationId xmlns:a16="http://schemas.microsoft.com/office/drawing/2014/main" id="{499F6A04-361B-D03C-72FC-83746A3861FC}"/>
+            </a:ext>
+          </a:extLst>
+        </p:cNvPr>
         <p:cNvGrpSpPr/>
         <p:nvPr/>
       </p:nvGrpSpPr>
@@ -3171,7 +3205,13 @@
       </p:grpSpPr>
       <p:sp>
         <p:nvSpPr>
-          <p:cNvPr id="5" name="內容版面配置區 4"/>
+          <p:cNvPr id="5" name="內容版面配置區 4">
+            <a:extLst>
+              <a:ext uri="{FF2B5EF4-FFF2-40B4-BE49-F238E27FC236}">
+                <a16:creationId xmlns:a16="http://schemas.microsoft.com/office/drawing/2014/main" id="{EE77592B-EE8B-614D-4160-CDFC7BCE80DB}"/>
+              </a:ext>
+            </a:extLst>
+          </p:cNvPr>
           <p:cNvSpPr>
             <a:spLocks noGrp="1"/>
           </p:cNvSpPr>
@@ -3181,8 +3221,8 @@
         </p:nvSpPr>
         <p:spPr>
           <a:xfrm>
-            <a:off x="0" y="1563638"/>
-            <a:ext cx="9144000" cy="1803647"/>
+            <a:off x="0" y="2084851"/>
+            <a:ext cx="12192000" cy="2404863"/>
           </a:xfrm>
         </p:spPr>
         <p:txBody>
@@ -3195,36 +3235,31 @@
               <a:buNone/>
             </a:pPr>
             <a:r>
-              <a:rPr lang="zh-TW" altLang="en-US" sz="4800" b="1" dirty="0">
+              <a:rPr lang="zh-TW" altLang="en-US" sz="6400" b="1" dirty="0">
                 <a:solidFill>
                   <a:srgbClr val="000066"/>
                 </a:solidFill>
                 <a:latin typeface="微軟正黑體" pitchFamily="34" charset="-120"/>
                 <a:ea typeface="微軟正黑體" pitchFamily="34" charset="-120"/>
               </a:rPr>
-              <a:t>我能用什麼報答</a:t>
-            </a:r>
-            <a:r>
-              <a:rPr lang="zh-CN" altLang="en-US" sz="4800" b="1" dirty="0">
+              <a:t>我能用什麼   報答祢恩典</a:t>
+            </a:r>
+          </a:p>
+          <a:p>
+            <a:pPr algn="ctr">
+              <a:buNone/>
+            </a:pPr>
+            <a:r>
+              <a:rPr lang="zh-TW" altLang="en-US" sz="6400" b="1" dirty="0">
                 <a:solidFill>
                   <a:srgbClr val="000066"/>
                 </a:solidFill>
                 <a:latin typeface="微軟正黑體" pitchFamily="34" charset="-120"/>
                 <a:ea typeface="微軟正黑體" pitchFamily="34" charset="-120"/>
               </a:rPr>
-              <a:t>祢</a:t>
-            </a:r>
-            <a:r>
-              <a:rPr lang="zh-TW" altLang="en-US" sz="4800" b="1" dirty="0">
-                <a:solidFill>
-                  <a:srgbClr val="000066"/>
-                </a:solidFill>
-                <a:latin typeface="微軟正黑體" pitchFamily="34" charset="-120"/>
-                <a:ea typeface="微軟正黑體" pitchFamily="34" charset="-120"/>
-              </a:rPr>
-              <a:t>恩典</a:t>
-            </a:r>
-            <a:endParaRPr lang="en-US" altLang="zh-TW" sz="4800" b="1" dirty="0">
+              <a:t>世上的一切   無法換取祢的愛</a:t>
+            </a:r>
+            <a:endParaRPr lang="en-US" altLang="zh-TW" sz="6400" b="1" dirty="0">
               <a:solidFill>
                 <a:srgbClr val="000066"/>
               </a:solidFill>
@@ -3232,60 +3267,24 @@
               <a:ea typeface="微軟正黑體" pitchFamily="34" charset="-120"/>
             </a:endParaRPr>
           </a:p>
-          <a:p>
-            <a:pPr algn="ctr">
-              <a:buNone/>
-            </a:pPr>
-            <a:r>
-              <a:rPr lang="zh-TW" altLang="en-US" sz="4800" b="1" dirty="0">
-                <a:solidFill>
-                  <a:srgbClr val="000066"/>
-                </a:solidFill>
-                <a:latin typeface="微軟正黑體" pitchFamily="34" charset="-120"/>
-                <a:ea typeface="微軟正黑體" pitchFamily="34" charset="-120"/>
-              </a:rPr>
-              <a:t>世上的一切  無法換取</a:t>
-            </a:r>
-            <a:r>
-              <a:rPr lang="zh-CN" altLang="en-US" sz="4800" b="1" dirty="0">
-                <a:solidFill>
-                  <a:srgbClr val="000066"/>
-                </a:solidFill>
-                <a:latin typeface="微軟正黑體" pitchFamily="34" charset="-120"/>
-                <a:ea typeface="微軟正黑體" pitchFamily="34" charset="-120"/>
-              </a:rPr>
-              <a:t>祢</a:t>
-            </a:r>
-            <a:r>
-              <a:rPr lang="zh-TW" altLang="en-US" sz="4800" b="1" dirty="0">
-                <a:solidFill>
-                  <a:srgbClr val="000066"/>
-                </a:solidFill>
-                <a:latin typeface="微軟正黑體" pitchFamily="34" charset="-120"/>
-                <a:ea typeface="微軟正黑體" pitchFamily="34" charset="-120"/>
-              </a:rPr>
-              <a:t>的愛</a:t>
-            </a:r>
-            <a:endParaRPr lang="en-US" altLang="zh-TW" sz="4800" b="1" dirty="0">
-              <a:solidFill>
-                <a:srgbClr val="000066"/>
-              </a:solidFill>
-              <a:latin typeface="微軟正黑體" pitchFamily="34" charset="-120"/>
-              <a:ea typeface="微軟正黑體" pitchFamily="34" charset="-120"/>
-            </a:endParaRPr>
-          </a:p>
-        </p:txBody>
-      </p:sp>
-      <p:sp>
-        <p:nvSpPr>
-          <p:cNvPr id="3" name="TextBox 2"/>
+        </p:txBody>
+      </p:sp>
+      <p:sp>
+        <p:nvSpPr>
+          <p:cNvPr id="3" name="TextBox 2">
+            <a:extLst>
+              <a:ext uri="{FF2B5EF4-FFF2-40B4-BE49-F238E27FC236}">
+                <a16:creationId xmlns:a16="http://schemas.microsoft.com/office/drawing/2014/main" id="{FA175DD0-F211-14DE-420F-4A50F79B6BD2}"/>
+              </a:ext>
+            </a:extLst>
+          </p:cNvPr>
           <p:cNvSpPr txBox="1"/>
           <p:nvPr/>
         </p:nvSpPr>
         <p:spPr>
           <a:xfrm>
-            <a:off x="0" y="3867894"/>
-            <a:ext cx="9144000" cy="523220"/>
+            <a:off x="0" y="5157193"/>
+            <a:ext cx="12192000" cy="584775"/>
           </a:xfrm>
           <a:prstGeom prst="rect">
             <a:avLst/>
@@ -3300,7 +3299,7 @@
           <a:p>
             <a:pPr algn="ctr"/>
             <a:r>
-              <a:rPr lang="en-US" sz="2800" b="1" dirty="0" smtClean="0">
+              <a:rPr lang="en-US" sz="3200" b="1" dirty="0">
                 <a:solidFill>
                   <a:srgbClr val="000066"/>
                 </a:solidFill>
@@ -3310,7 +3309,7 @@
               <a:t>( </a:t>
             </a:r>
             <a:r>
-              <a:rPr lang="zh-CN" altLang="en-US" sz="2800" b="1" dirty="0" smtClean="0">
+              <a:rPr lang="zh-CN" altLang="en-US" sz="3200" b="1" dirty="0">
                 <a:solidFill>
                   <a:srgbClr val="000066"/>
                 </a:solidFill>
@@ -3320,26 +3319,16 @@
               <a:t>正歌</a:t>
             </a:r>
             <a:r>
-              <a:rPr lang="en-US" sz="2800" b="1" dirty="0" smtClean="0">
+              <a:rPr lang="en-US" sz="3200" b="1" dirty="0">
                 <a:solidFill>
                   <a:srgbClr val="000066"/>
                 </a:solidFill>
                 <a:latin typeface="Microsoft JhengHei" panose="020B0604030504040204" pitchFamily="34" charset="-120"/>
                 <a:ea typeface="Microsoft JhengHei" panose="020B0604030504040204" pitchFamily="34" charset="-120"/>
               </a:rPr>
-              <a:t> </a:t>
-            </a:r>
-            <a:r>
-              <a:rPr lang="en-US" sz="2800" b="1" dirty="0" smtClean="0">
-                <a:solidFill>
-                  <a:srgbClr val="000066"/>
-                </a:solidFill>
-                <a:latin typeface="Microsoft JhengHei" panose="020B0604030504040204" pitchFamily="34" charset="-120"/>
-                <a:ea typeface="Microsoft JhengHei" panose="020B0604030504040204" pitchFamily="34" charset="-120"/>
-              </a:rPr>
-              <a:t>)</a:t>
-            </a:r>
-            <a:endParaRPr lang="vi-VN" sz="2800" b="1" dirty="0">
+              <a:t> )</a:t>
+            </a:r>
+            <a:endParaRPr lang="vi-VN" sz="3200" b="1" dirty="0">
               <a:solidFill>
                 <a:srgbClr val="000066"/>
               </a:solidFill>
@@ -3351,7 +3340,7 @@
     </p:spTree>
     <p:extLst>
       <p:ext uri="{BB962C8B-B14F-4D97-AF65-F5344CB8AC3E}">
-        <p14:creationId xmlns:p14="http://schemas.microsoft.com/office/powerpoint/2010/main" val="725371420"/>
+        <p14:creationId xmlns:p14="http://schemas.microsoft.com/office/powerpoint/2010/main" val="3885075056"/>
       </p:ext>
     </p:extLst>
   </p:cSld>
@@ -3366,7 +3355,13 @@
   <p:cSld>
     <p:spTree>
       <p:nvGrpSpPr>
-        <p:cNvPr id="1" name=""/>
+        <p:cNvPr id="1" name="">
+          <a:extLst>
+            <a:ext uri="{FF2B5EF4-FFF2-40B4-BE49-F238E27FC236}">
+              <a16:creationId xmlns:a16="http://schemas.microsoft.com/office/drawing/2014/main" id="{1CE1EA74-A2BE-0928-092A-1514B43261A1}"/>
+            </a:ext>
+          </a:extLst>
+        </p:cNvPr>
         <p:cNvGrpSpPr/>
         <p:nvPr/>
       </p:nvGrpSpPr>
@@ -3380,7 +3375,13 @@
       </p:grpSpPr>
       <p:sp>
         <p:nvSpPr>
-          <p:cNvPr id="5" name="內容版面配置區 4"/>
+          <p:cNvPr id="5" name="內容版面配置區 4">
+            <a:extLst>
+              <a:ext uri="{FF2B5EF4-FFF2-40B4-BE49-F238E27FC236}">
+                <a16:creationId xmlns:a16="http://schemas.microsoft.com/office/drawing/2014/main" id="{82BE07DE-726E-9DAE-DDFD-7B30AF710D9D}"/>
+              </a:ext>
+            </a:extLst>
+          </p:cNvPr>
           <p:cNvSpPr>
             <a:spLocks noGrp="1"/>
           </p:cNvSpPr>
@@ -3390,8 +3391,8 @@
         </p:nvSpPr>
         <p:spPr>
           <a:xfrm>
-            <a:off x="0" y="1563638"/>
-            <a:ext cx="9144000" cy="1803647"/>
+            <a:off x="0" y="2084851"/>
+            <a:ext cx="12192000" cy="2404863"/>
           </a:xfrm>
         </p:spPr>
         <p:txBody>
@@ -3404,16 +3405,31 @@
               <a:buNone/>
             </a:pPr>
             <a:r>
-              <a:rPr lang="zh-TW" altLang="en-US" sz="4800" b="1" dirty="0">
+              <a:rPr lang="zh-TW" altLang="en-US" sz="6400" b="1" dirty="0">
                 <a:solidFill>
                   <a:srgbClr val="000066"/>
                 </a:solidFill>
                 <a:latin typeface="微軟正黑體" pitchFamily="34" charset="-120"/>
                 <a:ea typeface="微軟正黑體" pitchFamily="34" charset="-120"/>
               </a:rPr>
-              <a:t>白白地得來  無止盡赦免</a:t>
-            </a:r>
-            <a:endParaRPr lang="en-US" altLang="zh-TW" sz="4800" b="1" dirty="0">
+              <a:t>白白地得來   無止盡赦免</a:t>
+            </a:r>
+          </a:p>
+          <a:p>
+            <a:pPr algn="ctr">
+              <a:buNone/>
+            </a:pPr>
+            <a:r>
+              <a:rPr lang="zh-TW" altLang="en-US" sz="6400" b="1" dirty="0">
+                <a:solidFill>
+                  <a:srgbClr val="000066"/>
+                </a:solidFill>
+                <a:latin typeface="微軟正黑體" pitchFamily="34" charset="-120"/>
+                <a:ea typeface="微軟正黑體" pitchFamily="34" charset="-120"/>
+              </a:rPr>
+              <a:t>盡在寶血和十架</a:t>
+            </a:r>
+            <a:endParaRPr lang="en-US" altLang="zh-TW" sz="6400" b="1" dirty="0">
               <a:solidFill>
                 <a:srgbClr val="000066"/>
               </a:solidFill>
@@ -3421,33 +3437,24 @@
               <a:ea typeface="微軟正黑體" pitchFamily="34" charset="-120"/>
             </a:endParaRPr>
           </a:p>
-          <a:p>
-            <a:pPr algn="ctr">
-              <a:buNone/>
-            </a:pPr>
-            <a:r>
-              <a:rPr lang="zh-TW" altLang="en-US" sz="4800" b="1" dirty="0">
-                <a:solidFill>
-                  <a:srgbClr val="000066"/>
-                </a:solidFill>
-                <a:latin typeface="微軟正黑體" pitchFamily="34" charset="-120"/>
-                <a:ea typeface="微軟正黑體" pitchFamily="34" charset="-120"/>
-              </a:rPr>
-              <a:t>盡在寶血和十架</a:t>
-            </a:r>
-          </a:p>
-        </p:txBody>
-      </p:sp>
-      <p:sp>
-        <p:nvSpPr>
-          <p:cNvPr id="3" name="TextBox 2"/>
+        </p:txBody>
+      </p:sp>
+      <p:sp>
+        <p:nvSpPr>
+          <p:cNvPr id="3" name="TextBox 2">
+            <a:extLst>
+              <a:ext uri="{FF2B5EF4-FFF2-40B4-BE49-F238E27FC236}">
+                <a16:creationId xmlns:a16="http://schemas.microsoft.com/office/drawing/2014/main" id="{7C2DB5A1-41A9-15C3-55F5-DD1F5B7D81CE}"/>
+              </a:ext>
+            </a:extLst>
+          </p:cNvPr>
           <p:cNvSpPr txBox="1"/>
           <p:nvPr/>
         </p:nvSpPr>
         <p:spPr>
           <a:xfrm>
-            <a:off x="0" y="3867894"/>
-            <a:ext cx="9144000" cy="523220"/>
+            <a:off x="0" y="5157193"/>
+            <a:ext cx="12192000" cy="584775"/>
           </a:xfrm>
           <a:prstGeom prst="rect">
             <a:avLst/>
@@ -3462,7 +3469,7 @@
           <a:p>
             <a:pPr algn="ctr"/>
             <a:r>
-              <a:rPr lang="en-US" sz="2800" b="1" dirty="0" smtClean="0">
+              <a:rPr lang="en-US" sz="3200" b="1" dirty="0">
                 <a:solidFill>
                   <a:srgbClr val="000066"/>
                 </a:solidFill>
@@ -3472,7 +3479,7 @@
               <a:t>( </a:t>
             </a:r>
             <a:r>
-              <a:rPr lang="zh-CN" altLang="en-US" sz="2800" b="1" dirty="0" smtClean="0">
+              <a:rPr lang="zh-CN" altLang="en-US" sz="3200" b="1" dirty="0">
                 <a:solidFill>
                   <a:srgbClr val="000066"/>
                 </a:solidFill>
@@ -3482,26 +3489,16 @@
               <a:t>正歌</a:t>
             </a:r>
             <a:r>
-              <a:rPr lang="en-US" sz="2800" b="1" dirty="0" smtClean="0">
+              <a:rPr lang="en-US" sz="3200" b="1" dirty="0">
                 <a:solidFill>
                   <a:srgbClr val="000066"/>
                 </a:solidFill>
                 <a:latin typeface="Microsoft JhengHei" panose="020B0604030504040204" pitchFamily="34" charset="-120"/>
                 <a:ea typeface="Microsoft JhengHei" panose="020B0604030504040204" pitchFamily="34" charset="-120"/>
               </a:rPr>
-              <a:t> </a:t>
-            </a:r>
-            <a:r>
-              <a:rPr lang="en-US" sz="2800" b="1" dirty="0" smtClean="0">
-                <a:solidFill>
-                  <a:srgbClr val="000066"/>
-                </a:solidFill>
-                <a:latin typeface="Microsoft JhengHei" panose="020B0604030504040204" pitchFamily="34" charset="-120"/>
-                <a:ea typeface="Microsoft JhengHei" panose="020B0604030504040204" pitchFamily="34" charset="-120"/>
-              </a:rPr>
-              <a:t>)</a:t>
-            </a:r>
-            <a:endParaRPr lang="vi-VN" sz="2800" b="1" dirty="0">
+              <a:t> )</a:t>
+            </a:r>
+            <a:endParaRPr lang="vi-VN" sz="3200" b="1" dirty="0">
               <a:solidFill>
                 <a:srgbClr val="000066"/>
               </a:solidFill>
@@ -3513,7 +3510,7 @@
     </p:spTree>
     <p:extLst>
       <p:ext uri="{BB962C8B-B14F-4D97-AF65-F5344CB8AC3E}">
-        <p14:creationId xmlns:p14="http://schemas.microsoft.com/office/powerpoint/2010/main" val="1851784562"/>
+        <p14:creationId xmlns:p14="http://schemas.microsoft.com/office/powerpoint/2010/main" val="1784519322"/>
       </p:ext>
     </p:extLst>
   </p:cSld>
@@ -3528,7 +3525,13 @@
   <p:cSld>
     <p:spTree>
       <p:nvGrpSpPr>
-        <p:cNvPr id="1" name=""/>
+        <p:cNvPr id="1" name="">
+          <a:extLst>
+            <a:ext uri="{FF2B5EF4-FFF2-40B4-BE49-F238E27FC236}">
+              <a16:creationId xmlns:a16="http://schemas.microsoft.com/office/drawing/2014/main" id="{0768DF5D-80D7-A938-44B4-7FEA52489E9D}"/>
+            </a:ext>
+          </a:extLst>
+        </p:cNvPr>
         <p:cNvGrpSpPr/>
         <p:nvPr/>
       </p:nvGrpSpPr>
@@ -3542,7 +3545,13 @@
       </p:grpSpPr>
       <p:sp>
         <p:nvSpPr>
-          <p:cNvPr id="5" name="內容版面配置區 4"/>
+          <p:cNvPr id="5" name="內容版面配置區 4">
+            <a:extLst>
+              <a:ext uri="{FF2B5EF4-FFF2-40B4-BE49-F238E27FC236}">
+                <a16:creationId xmlns:a16="http://schemas.microsoft.com/office/drawing/2014/main" id="{692727D9-7A99-3602-0EDF-65769B4DEE4D}"/>
+              </a:ext>
+            </a:extLst>
+          </p:cNvPr>
           <p:cNvSpPr>
             <a:spLocks noGrp="1"/>
           </p:cNvSpPr>
@@ -3552,8 +3561,8 @@
         </p:nvSpPr>
         <p:spPr>
           <a:xfrm>
-            <a:off x="0" y="1563638"/>
-            <a:ext cx="9144000" cy="1803647"/>
+            <a:off x="0" y="2084851"/>
+            <a:ext cx="12192000" cy="2404863"/>
           </a:xfrm>
         </p:spPr>
         <p:txBody>
@@ -3566,36 +3575,31 @@
               <a:buNone/>
             </a:pPr>
             <a:r>
-              <a:rPr lang="zh-TW" altLang="en-US" sz="4800" b="1" dirty="0">
+              <a:rPr lang="zh-TW" altLang="en-US" sz="6400" b="1" dirty="0">
                 <a:solidFill>
                   <a:srgbClr val="000066"/>
                 </a:solidFill>
                 <a:latin typeface="微軟正黑體" pitchFamily="34" charset="-120"/>
                 <a:ea typeface="微軟正黑體" pitchFamily="34" charset="-120"/>
               </a:rPr>
-              <a:t>謝謝</a:t>
-            </a:r>
-            <a:r>
-              <a:rPr lang="zh-CN" altLang="en-US" sz="4800" b="1" dirty="0">
+              <a:t>謝謝祢   洗淨我的罪 </a:t>
+            </a:r>
+          </a:p>
+          <a:p>
+            <a:pPr algn="ctr">
+              <a:buNone/>
+            </a:pPr>
+            <a:r>
+              <a:rPr lang="zh-TW" altLang="en-US" sz="6400" b="1" dirty="0">
                 <a:solidFill>
                   <a:srgbClr val="000066"/>
                 </a:solidFill>
                 <a:latin typeface="微軟正黑體" pitchFamily="34" charset="-120"/>
                 <a:ea typeface="微軟正黑體" pitchFamily="34" charset="-120"/>
               </a:rPr>
-              <a:t>祢</a:t>
-            </a:r>
-            <a:r>
-              <a:rPr lang="zh-TW" altLang="en-US" sz="4800" b="1" dirty="0">
-                <a:solidFill>
-                  <a:srgbClr val="000066"/>
-                </a:solidFill>
-                <a:latin typeface="微軟正黑體" pitchFamily="34" charset="-120"/>
-                <a:ea typeface="微軟正黑體" pitchFamily="34" charset="-120"/>
-              </a:rPr>
-              <a:t>洗淨我的罪</a:t>
-            </a:r>
-            <a:endParaRPr lang="en-US" altLang="zh-TW" sz="4800" b="1" dirty="0">
+              <a:t>謝謝祢   醫治我傷悲</a:t>
+            </a:r>
+            <a:endParaRPr lang="en-US" altLang="zh-TW" sz="6400" b="1" dirty="0">
               <a:solidFill>
                 <a:srgbClr val="000066"/>
               </a:solidFill>
@@ -3603,60 +3607,24 @@
               <a:ea typeface="微軟正黑體" pitchFamily="34" charset="-120"/>
             </a:endParaRPr>
           </a:p>
-          <a:p>
-            <a:pPr algn="ctr">
-              <a:buNone/>
-            </a:pPr>
-            <a:r>
-              <a:rPr lang="zh-TW" altLang="en-US" sz="4800" b="1" dirty="0">
-                <a:solidFill>
-                  <a:srgbClr val="000066"/>
-                </a:solidFill>
-                <a:latin typeface="微軟正黑體" pitchFamily="34" charset="-120"/>
-                <a:ea typeface="微軟正黑體" pitchFamily="34" charset="-120"/>
-              </a:rPr>
-              <a:t>謝謝</a:t>
-            </a:r>
-            <a:r>
-              <a:rPr lang="zh-CN" altLang="en-US" sz="4800" b="1" dirty="0">
-                <a:solidFill>
-                  <a:srgbClr val="000066"/>
-                </a:solidFill>
-                <a:latin typeface="微軟正黑體" pitchFamily="34" charset="-120"/>
-                <a:ea typeface="微軟正黑體" pitchFamily="34" charset="-120"/>
-              </a:rPr>
-              <a:t>祢</a:t>
-            </a:r>
-            <a:r>
-              <a:rPr lang="zh-TW" altLang="en-US" sz="4800" b="1" dirty="0">
-                <a:solidFill>
-                  <a:srgbClr val="000066"/>
-                </a:solidFill>
-                <a:latin typeface="微軟正黑體" pitchFamily="34" charset="-120"/>
-                <a:ea typeface="微軟正黑體" pitchFamily="34" charset="-120"/>
-              </a:rPr>
-              <a:t>醫治我傷悲</a:t>
-            </a:r>
-            <a:endParaRPr lang="en-US" altLang="zh-TW" sz="4800" b="1" dirty="0">
-              <a:solidFill>
-                <a:srgbClr val="000066"/>
-              </a:solidFill>
-              <a:latin typeface="微軟正黑體" pitchFamily="34" charset="-120"/>
-              <a:ea typeface="微軟正黑體" pitchFamily="34" charset="-120"/>
-            </a:endParaRPr>
-          </a:p>
-        </p:txBody>
-      </p:sp>
-      <p:sp>
-        <p:nvSpPr>
-          <p:cNvPr id="3" name="TextBox 2"/>
+        </p:txBody>
+      </p:sp>
+      <p:sp>
+        <p:nvSpPr>
+          <p:cNvPr id="3" name="TextBox 2">
+            <a:extLst>
+              <a:ext uri="{FF2B5EF4-FFF2-40B4-BE49-F238E27FC236}">
+                <a16:creationId xmlns:a16="http://schemas.microsoft.com/office/drawing/2014/main" id="{A4FF63FC-3C3A-C219-3DA7-3D0626E0BB06}"/>
+              </a:ext>
+            </a:extLst>
+          </p:cNvPr>
           <p:cNvSpPr txBox="1"/>
           <p:nvPr/>
         </p:nvSpPr>
         <p:spPr>
           <a:xfrm>
-            <a:off x="0" y="3867894"/>
-            <a:ext cx="9144000" cy="523220"/>
+            <a:off x="0" y="5157193"/>
+            <a:ext cx="12192000" cy="584775"/>
           </a:xfrm>
           <a:prstGeom prst="rect">
             <a:avLst/>
@@ -3671,7 +3639,7 @@
           <a:p>
             <a:pPr algn="ctr"/>
             <a:r>
-              <a:rPr lang="en-US" sz="2800" b="1" dirty="0" smtClean="0">
+              <a:rPr lang="en-US" sz="3200" b="1" dirty="0">
                 <a:solidFill>
                   <a:srgbClr val="000066"/>
                 </a:solidFill>
@@ -3681,7 +3649,7 @@
               <a:t>( </a:t>
             </a:r>
             <a:r>
-              <a:rPr lang="zh-CN" altLang="en-US" sz="2800" b="1" dirty="0" smtClean="0">
+              <a:rPr lang="zh-CN" altLang="en-US" sz="3200" b="1" dirty="0">
                 <a:solidFill>
                   <a:srgbClr val="000066"/>
                 </a:solidFill>
@@ -3691,16 +3659,26 @@
               <a:t>副歌</a:t>
             </a:r>
             <a:r>
-              <a:rPr lang="en-US" sz="2800" b="1" dirty="0" smtClean="0">
+              <a:rPr lang="en-US" altLang="zh-CN" sz="3200" b="1" dirty="0">
                 <a:solidFill>
                   <a:srgbClr val="000066"/>
                 </a:solidFill>
                 <a:latin typeface="Microsoft JhengHei" panose="020B0604030504040204" pitchFamily="34" charset="-120"/>
                 <a:ea typeface="Microsoft JhengHei" panose="020B0604030504040204" pitchFamily="34" charset="-120"/>
               </a:rPr>
-              <a:t> 1 )</a:t>
-            </a:r>
-            <a:endParaRPr lang="vi-VN" sz="2800" b="1" dirty="0">
+              <a:t> 1</a:t>
+            </a:r>
+            <a:r>
+              <a:rPr lang="en-US" sz="3200" b="1" dirty="0">
+                <a:solidFill>
+                  <a:srgbClr val="000066"/>
+                </a:solidFill>
+                <a:latin typeface="Microsoft JhengHei" panose="020B0604030504040204" pitchFamily="34" charset="-120"/>
+                <a:ea typeface="Microsoft JhengHei" panose="020B0604030504040204" pitchFamily="34" charset="-120"/>
+              </a:rPr>
+              <a:t> )</a:t>
+            </a:r>
+            <a:endParaRPr lang="vi-VN" sz="3200" b="1" dirty="0">
               <a:solidFill>
                 <a:srgbClr val="000066"/>
               </a:solidFill>
@@ -3712,7 +3690,7 @@
     </p:spTree>
     <p:extLst>
       <p:ext uri="{BB962C8B-B14F-4D97-AF65-F5344CB8AC3E}">
-        <p14:creationId xmlns:p14="http://schemas.microsoft.com/office/powerpoint/2010/main" val="2125995832"/>
+        <p14:creationId xmlns:p14="http://schemas.microsoft.com/office/powerpoint/2010/main" val="3777178049"/>
       </p:ext>
     </p:extLst>
   </p:cSld>
@@ -3727,7 +3705,13 @@
   <p:cSld>
     <p:spTree>
       <p:nvGrpSpPr>
-        <p:cNvPr id="1" name=""/>
+        <p:cNvPr id="1" name="">
+          <a:extLst>
+            <a:ext uri="{FF2B5EF4-FFF2-40B4-BE49-F238E27FC236}">
+              <a16:creationId xmlns:a16="http://schemas.microsoft.com/office/drawing/2014/main" id="{2F39891F-DFDA-752C-6E7F-D7250BC04957}"/>
+            </a:ext>
+          </a:extLst>
+        </p:cNvPr>
         <p:cNvGrpSpPr/>
         <p:nvPr/>
       </p:nvGrpSpPr>
@@ -3741,7 +3725,13 @@
       </p:grpSpPr>
       <p:sp>
         <p:nvSpPr>
-          <p:cNvPr id="5" name="內容版面配置區 4"/>
+          <p:cNvPr id="5" name="內容版面配置區 4">
+            <a:extLst>
+              <a:ext uri="{FF2B5EF4-FFF2-40B4-BE49-F238E27FC236}">
+                <a16:creationId xmlns:a16="http://schemas.microsoft.com/office/drawing/2014/main" id="{E2C00448-7F6E-DD5D-2CD8-2C1009642162}"/>
+              </a:ext>
+            </a:extLst>
+          </p:cNvPr>
           <p:cNvSpPr>
             <a:spLocks noGrp="1"/>
           </p:cNvSpPr>
@@ -3751,8 +3741,8 @@
         </p:nvSpPr>
         <p:spPr>
           <a:xfrm>
-            <a:off x="0" y="1563638"/>
-            <a:ext cx="9144000" cy="1803647"/>
+            <a:off x="0" y="2084851"/>
+            <a:ext cx="12192000" cy="2404863"/>
           </a:xfrm>
         </p:spPr>
         <p:txBody>
@@ -3765,36 +3755,31 @@
               <a:buNone/>
             </a:pPr>
             <a:r>
-              <a:rPr lang="zh-TW" altLang="en-US" sz="4800" b="1" dirty="0">
+              <a:rPr lang="zh-TW" altLang="en-US" sz="6400" b="1" dirty="0">
                 <a:solidFill>
                   <a:srgbClr val="000066"/>
                 </a:solidFill>
                 <a:latin typeface="微軟正黑體" pitchFamily="34" charset="-120"/>
                 <a:ea typeface="微軟正黑體" pitchFamily="34" charset="-120"/>
               </a:rPr>
-              <a:t>謝謝</a:t>
-            </a:r>
-            <a:r>
-              <a:rPr lang="zh-CN" altLang="en-US" sz="4800" b="1" dirty="0">
+              <a:t>謝謝祢   擦乾我的眼淚</a:t>
+            </a:r>
+          </a:p>
+          <a:p>
+            <a:pPr algn="ctr">
+              <a:buNone/>
+            </a:pPr>
+            <a:r>
+              <a:rPr lang="zh-TW" altLang="en-US" sz="6400" b="1" dirty="0">
                 <a:solidFill>
                   <a:srgbClr val="000066"/>
                 </a:solidFill>
                 <a:latin typeface="微軟正黑體" pitchFamily="34" charset="-120"/>
                 <a:ea typeface="微軟正黑體" pitchFamily="34" charset="-120"/>
               </a:rPr>
-              <a:t>祢</a:t>
-            </a:r>
-            <a:r>
-              <a:rPr lang="zh-TW" altLang="en-US" sz="4800" b="1" dirty="0">
-                <a:solidFill>
-                  <a:srgbClr val="000066"/>
-                </a:solidFill>
-                <a:latin typeface="微軟正黑體" pitchFamily="34" charset="-120"/>
-                <a:ea typeface="微軟正黑體" pitchFamily="34" charset="-120"/>
-              </a:rPr>
-              <a:t>擦乾我的眼淚</a:t>
-            </a:r>
-            <a:endParaRPr lang="en-US" altLang="zh-TW" sz="4800" b="1" dirty="0">
+              <a:t>挪去後悔   釋放我的纏累</a:t>
+            </a:r>
+            <a:endParaRPr lang="en-US" altLang="zh-TW" sz="6400" b="1" dirty="0">
               <a:solidFill>
                 <a:srgbClr val="000066"/>
               </a:solidFill>
@@ -3802,33 +3787,24 @@
               <a:ea typeface="微軟正黑體" pitchFamily="34" charset="-120"/>
             </a:endParaRPr>
           </a:p>
-          <a:p>
-            <a:pPr algn="ctr">
-              <a:buNone/>
-            </a:pPr>
-            <a:r>
-              <a:rPr lang="zh-TW" altLang="en-US" sz="4800" b="1" dirty="0">
-                <a:solidFill>
-                  <a:srgbClr val="000066"/>
-                </a:solidFill>
-                <a:latin typeface="微軟正黑體" pitchFamily="34" charset="-120"/>
-                <a:ea typeface="微軟正黑體" pitchFamily="34" charset="-120"/>
-              </a:rPr>
-              <a:t>挪去後悔  釋放我的纏累</a:t>
-            </a:r>
-          </a:p>
-        </p:txBody>
-      </p:sp>
-      <p:sp>
-        <p:nvSpPr>
-          <p:cNvPr id="3" name="TextBox 2"/>
+        </p:txBody>
+      </p:sp>
+      <p:sp>
+        <p:nvSpPr>
+          <p:cNvPr id="3" name="TextBox 2">
+            <a:extLst>
+              <a:ext uri="{FF2B5EF4-FFF2-40B4-BE49-F238E27FC236}">
+                <a16:creationId xmlns:a16="http://schemas.microsoft.com/office/drawing/2014/main" id="{A431951C-3FF3-9356-62D6-437E6164B00A}"/>
+              </a:ext>
+            </a:extLst>
+          </p:cNvPr>
           <p:cNvSpPr txBox="1"/>
           <p:nvPr/>
         </p:nvSpPr>
         <p:spPr>
           <a:xfrm>
-            <a:off x="0" y="3867894"/>
-            <a:ext cx="9144000" cy="523220"/>
+            <a:off x="0" y="5157193"/>
+            <a:ext cx="12192000" cy="584775"/>
           </a:xfrm>
           <a:prstGeom prst="rect">
             <a:avLst/>
@@ -3843,7 +3819,7 @@
           <a:p>
             <a:pPr algn="ctr"/>
             <a:r>
-              <a:rPr lang="en-US" sz="2800" b="1" dirty="0">
+              <a:rPr lang="en-US" sz="3200" b="1" dirty="0">
                 <a:solidFill>
                   <a:srgbClr val="000066"/>
                 </a:solidFill>
@@ -3853,7 +3829,7 @@
               <a:t>( </a:t>
             </a:r>
             <a:r>
-              <a:rPr lang="zh-CN" altLang="en-US" sz="2800" b="1" dirty="0">
+              <a:rPr lang="zh-CN" altLang="en-US" sz="3200" b="1" dirty="0">
                 <a:solidFill>
                   <a:srgbClr val="000066"/>
                 </a:solidFill>
@@ -3863,16 +3839,26 @@
               <a:t>副歌</a:t>
             </a:r>
             <a:r>
-              <a:rPr lang="en-US" sz="2800" b="1" dirty="0">
+              <a:rPr lang="en-US" altLang="zh-CN" sz="3200" b="1" dirty="0">
                 <a:solidFill>
                   <a:srgbClr val="000066"/>
                 </a:solidFill>
                 <a:latin typeface="Microsoft JhengHei" panose="020B0604030504040204" pitchFamily="34" charset="-120"/>
                 <a:ea typeface="Microsoft JhengHei" panose="020B0604030504040204" pitchFamily="34" charset="-120"/>
               </a:rPr>
-              <a:t> 1 )</a:t>
-            </a:r>
-            <a:endParaRPr lang="vi-VN" sz="2800" b="1" dirty="0">
+              <a:t> 1</a:t>
+            </a:r>
+            <a:r>
+              <a:rPr lang="en-US" sz="3200" b="1" dirty="0">
+                <a:solidFill>
+                  <a:srgbClr val="000066"/>
+                </a:solidFill>
+                <a:latin typeface="Microsoft JhengHei" panose="020B0604030504040204" pitchFamily="34" charset="-120"/>
+                <a:ea typeface="Microsoft JhengHei" panose="020B0604030504040204" pitchFamily="34" charset="-120"/>
+              </a:rPr>
+              <a:t> )</a:t>
+            </a:r>
+            <a:endParaRPr lang="vi-VN" sz="3200" b="1" dirty="0">
               <a:solidFill>
                 <a:srgbClr val="000066"/>
               </a:solidFill>
@@ -3884,7 +3870,7 @@
     </p:spTree>
     <p:extLst>
       <p:ext uri="{BB962C8B-B14F-4D97-AF65-F5344CB8AC3E}">
-        <p14:creationId xmlns:p14="http://schemas.microsoft.com/office/powerpoint/2010/main" val="305393865"/>
+        <p14:creationId xmlns:p14="http://schemas.microsoft.com/office/powerpoint/2010/main" val="8211618"/>
       </p:ext>
     </p:extLst>
   </p:cSld>
@@ -3899,7 +3885,13 @@
   <p:cSld>
     <p:spTree>
       <p:nvGrpSpPr>
-        <p:cNvPr id="1" name=""/>
+        <p:cNvPr id="1" name="">
+          <a:extLst>
+            <a:ext uri="{FF2B5EF4-FFF2-40B4-BE49-F238E27FC236}">
+              <a16:creationId xmlns:a16="http://schemas.microsoft.com/office/drawing/2014/main" id="{246FFAA0-71EE-C9DD-CEB2-C592CE60536F}"/>
+            </a:ext>
+          </a:extLst>
+        </p:cNvPr>
         <p:cNvGrpSpPr/>
         <p:nvPr/>
       </p:nvGrpSpPr>
@@ -3913,7 +3905,13 @@
       </p:grpSpPr>
       <p:sp>
         <p:nvSpPr>
-          <p:cNvPr id="5" name="內容版面配置區 4"/>
+          <p:cNvPr id="5" name="內容版面配置區 4">
+            <a:extLst>
+              <a:ext uri="{FF2B5EF4-FFF2-40B4-BE49-F238E27FC236}">
+                <a16:creationId xmlns:a16="http://schemas.microsoft.com/office/drawing/2014/main" id="{C89F09E3-D71B-2043-9C5A-031B581F3621}"/>
+              </a:ext>
+            </a:extLst>
+          </p:cNvPr>
           <p:cNvSpPr>
             <a:spLocks noGrp="1"/>
           </p:cNvSpPr>
@@ -3923,8 +3921,8 @@
         </p:nvSpPr>
         <p:spPr>
           <a:xfrm>
-            <a:off x="0" y="1563638"/>
-            <a:ext cx="9144000" cy="1803647"/>
+            <a:off x="0" y="2084851"/>
+            <a:ext cx="12192000" cy="2404863"/>
           </a:xfrm>
         </p:spPr>
         <p:txBody>
@@ -3937,36 +3935,31 @@
               <a:buNone/>
             </a:pPr>
             <a:r>
-              <a:rPr lang="zh-TW" altLang="en-US" sz="4800" b="1" dirty="0">
+              <a:rPr lang="zh-TW" altLang="en-US" sz="6400" b="1" dirty="0">
                 <a:solidFill>
                   <a:srgbClr val="000066"/>
                 </a:solidFill>
                 <a:latin typeface="微軟正黑體" pitchFamily="34" charset="-120"/>
                 <a:ea typeface="微軟正黑體" pitchFamily="34" charset="-120"/>
               </a:rPr>
-              <a:t>謝謝</a:t>
-            </a:r>
-            <a:r>
-              <a:rPr lang="zh-CN" altLang="en-US" sz="4800" b="1" dirty="0">
+              <a:t>謝謝祢   洗淨我的罪 </a:t>
+            </a:r>
+          </a:p>
+          <a:p>
+            <a:pPr algn="ctr">
+              <a:buNone/>
+            </a:pPr>
+            <a:r>
+              <a:rPr lang="zh-TW" altLang="en-US" sz="6400" b="1" dirty="0">
                 <a:solidFill>
                   <a:srgbClr val="000066"/>
                 </a:solidFill>
                 <a:latin typeface="微軟正黑體" pitchFamily="34" charset="-120"/>
                 <a:ea typeface="微軟正黑體" pitchFamily="34" charset="-120"/>
               </a:rPr>
-              <a:t>祢</a:t>
-            </a:r>
-            <a:r>
-              <a:rPr lang="zh-TW" altLang="en-US" sz="4800" b="1" dirty="0">
-                <a:solidFill>
-                  <a:srgbClr val="000066"/>
-                </a:solidFill>
-                <a:latin typeface="微軟正黑體" pitchFamily="34" charset="-120"/>
-                <a:ea typeface="微軟正黑體" pitchFamily="34" charset="-120"/>
-              </a:rPr>
-              <a:t>洗淨我的罪</a:t>
-            </a:r>
-            <a:endParaRPr lang="en-US" altLang="zh-TW" sz="4800" b="1" dirty="0">
+              <a:t>謝謝祢   醫治我傷悲</a:t>
+            </a:r>
+            <a:endParaRPr lang="en-US" altLang="zh-TW" sz="6400" b="1" dirty="0">
               <a:solidFill>
                 <a:srgbClr val="000066"/>
               </a:solidFill>
@@ -3974,60 +3967,24 @@
               <a:ea typeface="微軟正黑體" pitchFamily="34" charset="-120"/>
             </a:endParaRPr>
           </a:p>
-          <a:p>
-            <a:pPr algn="ctr">
-              <a:buNone/>
-            </a:pPr>
-            <a:r>
-              <a:rPr lang="zh-TW" altLang="en-US" sz="4800" b="1" dirty="0">
-                <a:solidFill>
-                  <a:srgbClr val="000066"/>
-                </a:solidFill>
-                <a:latin typeface="微軟正黑體" pitchFamily="34" charset="-120"/>
-                <a:ea typeface="微軟正黑體" pitchFamily="34" charset="-120"/>
-              </a:rPr>
-              <a:t>謝謝</a:t>
-            </a:r>
-            <a:r>
-              <a:rPr lang="zh-CN" altLang="en-US" sz="4800" b="1" dirty="0">
-                <a:solidFill>
-                  <a:srgbClr val="000066"/>
-                </a:solidFill>
-                <a:latin typeface="微軟正黑體" pitchFamily="34" charset="-120"/>
-                <a:ea typeface="微軟正黑體" pitchFamily="34" charset="-120"/>
-              </a:rPr>
-              <a:t>祢</a:t>
-            </a:r>
-            <a:r>
-              <a:rPr lang="zh-TW" altLang="en-US" sz="4800" b="1" dirty="0">
-                <a:solidFill>
-                  <a:srgbClr val="000066"/>
-                </a:solidFill>
-                <a:latin typeface="微軟正黑體" pitchFamily="34" charset="-120"/>
-                <a:ea typeface="微軟正黑體" pitchFamily="34" charset="-120"/>
-              </a:rPr>
-              <a:t>醫治我傷悲</a:t>
-            </a:r>
-            <a:endParaRPr lang="en-US" altLang="zh-TW" sz="4800" b="1" dirty="0">
-              <a:solidFill>
-                <a:srgbClr val="000066"/>
-              </a:solidFill>
-              <a:latin typeface="微軟正黑體" pitchFamily="34" charset="-120"/>
-              <a:ea typeface="微軟正黑體" pitchFamily="34" charset="-120"/>
-            </a:endParaRPr>
-          </a:p>
-        </p:txBody>
-      </p:sp>
-      <p:sp>
-        <p:nvSpPr>
-          <p:cNvPr id="3" name="TextBox 2"/>
+        </p:txBody>
+      </p:sp>
+      <p:sp>
+        <p:nvSpPr>
+          <p:cNvPr id="3" name="TextBox 2">
+            <a:extLst>
+              <a:ext uri="{FF2B5EF4-FFF2-40B4-BE49-F238E27FC236}">
+                <a16:creationId xmlns:a16="http://schemas.microsoft.com/office/drawing/2014/main" id="{31A36DE8-0C6C-39E8-A23E-1387D545430C}"/>
+              </a:ext>
+            </a:extLst>
+          </p:cNvPr>
           <p:cNvSpPr txBox="1"/>
           <p:nvPr/>
         </p:nvSpPr>
         <p:spPr>
           <a:xfrm>
-            <a:off x="0" y="3867894"/>
-            <a:ext cx="9144000" cy="523220"/>
+            <a:off x="0" y="5157193"/>
+            <a:ext cx="12192000" cy="584775"/>
           </a:xfrm>
           <a:prstGeom prst="rect">
             <a:avLst/>
@@ -4042,7 +3999,7 @@
           <a:p>
             <a:pPr algn="ctr"/>
             <a:r>
-              <a:rPr lang="en-US" sz="2800" b="1" dirty="0">
+              <a:rPr lang="en-US" sz="3200" b="1" dirty="0">
                 <a:solidFill>
                   <a:srgbClr val="000066"/>
                 </a:solidFill>
@@ -4052,7 +4009,7 @@
               <a:t>( </a:t>
             </a:r>
             <a:r>
-              <a:rPr lang="zh-CN" altLang="en-US" sz="2800" b="1" dirty="0">
+              <a:rPr lang="zh-CN" altLang="en-US" sz="3200" b="1" dirty="0">
                 <a:solidFill>
                   <a:srgbClr val="000066"/>
                 </a:solidFill>
@@ -4062,36 +4019,26 @@
               <a:t>副歌</a:t>
             </a:r>
             <a:r>
-              <a:rPr lang="en-US" sz="2800" b="1" dirty="0">
+              <a:rPr lang="en-US" altLang="zh-CN" sz="3200" b="1" dirty="0">
                 <a:solidFill>
                   <a:srgbClr val="000066"/>
                 </a:solidFill>
                 <a:latin typeface="Microsoft JhengHei" panose="020B0604030504040204" pitchFamily="34" charset="-120"/>
                 <a:ea typeface="Microsoft JhengHei" panose="020B0604030504040204" pitchFamily="34" charset="-120"/>
               </a:rPr>
-              <a:t> </a:t>
-            </a:r>
-            <a:r>
-              <a:rPr lang="en-US" sz="2800" b="1" dirty="0" smtClean="0">
+              <a:t> 2</a:t>
+            </a:r>
+            <a:r>
+              <a:rPr lang="en-US" sz="3200" b="1" dirty="0">
                 <a:solidFill>
                   <a:srgbClr val="000066"/>
                 </a:solidFill>
                 <a:latin typeface="Microsoft JhengHei" panose="020B0604030504040204" pitchFamily="34" charset="-120"/>
                 <a:ea typeface="Microsoft JhengHei" panose="020B0604030504040204" pitchFamily="34" charset="-120"/>
               </a:rPr>
-              <a:t>2 </a:t>
-            </a:r>
-            <a:r>
-              <a:rPr lang="en-US" sz="2800" b="1" dirty="0">
-                <a:solidFill>
-                  <a:srgbClr val="000066"/>
-                </a:solidFill>
-                <a:latin typeface="Microsoft JhengHei" panose="020B0604030504040204" pitchFamily="34" charset="-120"/>
-                <a:ea typeface="Microsoft JhengHei" panose="020B0604030504040204" pitchFamily="34" charset="-120"/>
-              </a:rPr>
-              <a:t>)</a:t>
-            </a:r>
-            <a:endParaRPr lang="vi-VN" sz="2800" b="1" dirty="0">
+              <a:t> )</a:t>
+            </a:r>
+            <a:endParaRPr lang="vi-VN" sz="3200" b="1" dirty="0">
               <a:solidFill>
                 <a:srgbClr val="000066"/>
               </a:solidFill>
@@ -4103,7 +4050,7 @@
     </p:spTree>
     <p:extLst>
       <p:ext uri="{BB962C8B-B14F-4D97-AF65-F5344CB8AC3E}">
-        <p14:creationId xmlns:p14="http://schemas.microsoft.com/office/powerpoint/2010/main" val="3897555218"/>
+        <p14:creationId xmlns:p14="http://schemas.microsoft.com/office/powerpoint/2010/main" val="3873195637"/>
       </p:ext>
     </p:extLst>
   </p:cSld>
@@ -4118,7 +4065,13 @@
   <p:cSld>
     <p:spTree>
       <p:nvGrpSpPr>
-        <p:cNvPr id="1" name=""/>
+        <p:cNvPr id="1" name="">
+          <a:extLst>
+            <a:ext uri="{FF2B5EF4-FFF2-40B4-BE49-F238E27FC236}">
+              <a16:creationId xmlns:a16="http://schemas.microsoft.com/office/drawing/2014/main" id="{B6EC1286-D30A-7A61-BEF4-DC60361E5D3F}"/>
+            </a:ext>
+          </a:extLst>
+        </p:cNvPr>
         <p:cNvGrpSpPr/>
         <p:nvPr/>
       </p:nvGrpSpPr>
@@ -4132,7 +4085,13 @@
       </p:grpSpPr>
       <p:sp>
         <p:nvSpPr>
-          <p:cNvPr id="5" name="內容版面配置區 4"/>
+          <p:cNvPr id="5" name="內容版面配置區 4">
+            <a:extLst>
+              <a:ext uri="{FF2B5EF4-FFF2-40B4-BE49-F238E27FC236}">
+                <a16:creationId xmlns:a16="http://schemas.microsoft.com/office/drawing/2014/main" id="{C2A6D378-9862-ECAA-DAC1-7FD9E045AC12}"/>
+              </a:ext>
+            </a:extLst>
+          </p:cNvPr>
           <p:cNvSpPr>
             <a:spLocks noGrp="1"/>
           </p:cNvSpPr>
@@ -4142,8 +4101,8 @@
         </p:nvSpPr>
         <p:spPr>
           <a:xfrm>
-            <a:off x="0" y="1563638"/>
-            <a:ext cx="9144000" cy="1803647"/>
+            <a:off x="0" y="2084851"/>
+            <a:ext cx="12192000" cy="2404863"/>
           </a:xfrm>
         </p:spPr>
         <p:txBody>
@@ -4156,36 +4115,31 @@
               <a:buNone/>
             </a:pPr>
             <a:r>
-              <a:rPr lang="zh-TW" altLang="en-US" sz="4800" b="1" dirty="0">
+              <a:rPr lang="zh-TW" altLang="en-US" sz="6400" b="1" dirty="0">
                 <a:solidFill>
                   <a:srgbClr val="000066"/>
                 </a:solidFill>
                 <a:latin typeface="微軟正黑體" pitchFamily="34" charset="-120"/>
                 <a:ea typeface="微軟正黑體" pitchFamily="34" charset="-120"/>
               </a:rPr>
-              <a:t>謝謝</a:t>
-            </a:r>
-            <a:r>
-              <a:rPr lang="zh-CN" altLang="en-US" sz="4800" b="1" dirty="0">
+              <a:t>謝謝祢   用生命將我贖回</a:t>
+            </a:r>
+          </a:p>
+          <a:p>
+            <a:pPr algn="ctr">
+              <a:buNone/>
+            </a:pPr>
+            <a:r>
+              <a:rPr lang="zh-TW" altLang="en-US" sz="6400" b="1" dirty="0">
                 <a:solidFill>
                   <a:srgbClr val="000066"/>
                 </a:solidFill>
                 <a:latin typeface="微軟正黑體" pitchFamily="34" charset="-120"/>
                 <a:ea typeface="微軟正黑體" pitchFamily="34" charset="-120"/>
               </a:rPr>
-              <a:t>祢</a:t>
-            </a:r>
-            <a:r>
-              <a:rPr lang="zh-TW" altLang="en-US" sz="4800" b="1" dirty="0">
-                <a:solidFill>
-                  <a:srgbClr val="000066"/>
-                </a:solidFill>
-                <a:latin typeface="微軟正黑體" pitchFamily="34" charset="-120"/>
-                <a:ea typeface="微軟正黑體" pitchFamily="34" charset="-120"/>
-              </a:rPr>
-              <a:t>用生命將我贖回</a:t>
-            </a:r>
-            <a:endParaRPr lang="en-US" altLang="zh-TW" sz="4800" b="1" dirty="0">
+              <a:t>我是天父   永遠最愛寶貝</a:t>
+            </a:r>
+            <a:endParaRPr lang="en-US" altLang="zh-TW" sz="6400" b="1" dirty="0">
               <a:solidFill>
                 <a:srgbClr val="000066"/>
               </a:solidFill>
@@ -4193,33 +4147,24 @@
               <a:ea typeface="微軟正黑體" pitchFamily="34" charset="-120"/>
             </a:endParaRPr>
           </a:p>
-          <a:p>
-            <a:pPr algn="ctr">
-              <a:buNone/>
-            </a:pPr>
-            <a:r>
-              <a:rPr lang="zh-TW" altLang="en-US" sz="4800" b="1" dirty="0">
-                <a:solidFill>
-                  <a:srgbClr val="000066"/>
-                </a:solidFill>
-                <a:latin typeface="微軟正黑體" pitchFamily="34" charset="-120"/>
-                <a:ea typeface="微軟正黑體" pitchFamily="34" charset="-120"/>
-              </a:rPr>
-              <a:t>我是天父永遠最愛寶貝</a:t>
-            </a:r>
-          </a:p>
-        </p:txBody>
-      </p:sp>
-      <p:sp>
-        <p:nvSpPr>
-          <p:cNvPr id="4" name="TextBox 3"/>
+        </p:txBody>
+      </p:sp>
+      <p:sp>
+        <p:nvSpPr>
+          <p:cNvPr id="3" name="TextBox 2">
+            <a:extLst>
+              <a:ext uri="{FF2B5EF4-FFF2-40B4-BE49-F238E27FC236}">
+                <a16:creationId xmlns:a16="http://schemas.microsoft.com/office/drawing/2014/main" id="{225AA154-920F-48A9-B8D1-02BC117B3E9D}"/>
+              </a:ext>
+            </a:extLst>
+          </p:cNvPr>
           <p:cNvSpPr txBox="1"/>
           <p:nvPr/>
         </p:nvSpPr>
         <p:spPr>
           <a:xfrm>
-            <a:off x="0" y="3867894"/>
-            <a:ext cx="9144000" cy="523220"/>
+            <a:off x="0" y="5157193"/>
+            <a:ext cx="12192000" cy="584775"/>
           </a:xfrm>
           <a:prstGeom prst="rect">
             <a:avLst/>
@@ -4234,7 +4179,7 @@
           <a:p>
             <a:pPr algn="ctr"/>
             <a:r>
-              <a:rPr lang="en-US" sz="2800" b="1" dirty="0">
+              <a:rPr lang="en-US" sz="3200" b="1" dirty="0">
                 <a:solidFill>
                   <a:srgbClr val="000066"/>
                 </a:solidFill>
@@ -4244,7 +4189,7 @@
               <a:t>( </a:t>
             </a:r>
             <a:r>
-              <a:rPr lang="zh-CN" altLang="en-US" sz="2800" b="1" dirty="0">
+              <a:rPr lang="zh-CN" altLang="en-US" sz="3200" b="1" dirty="0">
                 <a:solidFill>
                   <a:srgbClr val="000066"/>
                 </a:solidFill>
@@ -4254,36 +4199,26 @@
               <a:t>副歌</a:t>
             </a:r>
             <a:r>
-              <a:rPr lang="en-US" sz="2800" b="1" dirty="0">
+              <a:rPr lang="en-US" altLang="zh-CN" sz="3200" b="1" dirty="0">
                 <a:solidFill>
                   <a:srgbClr val="000066"/>
                 </a:solidFill>
                 <a:latin typeface="Microsoft JhengHei" panose="020B0604030504040204" pitchFamily="34" charset="-120"/>
                 <a:ea typeface="Microsoft JhengHei" panose="020B0604030504040204" pitchFamily="34" charset="-120"/>
               </a:rPr>
-              <a:t> </a:t>
-            </a:r>
-            <a:r>
-              <a:rPr lang="en-US" sz="2800" b="1" dirty="0" smtClean="0">
+              <a:t> 2</a:t>
+            </a:r>
+            <a:r>
+              <a:rPr lang="en-US" sz="3200" b="1" dirty="0">
                 <a:solidFill>
                   <a:srgbClr val="000066"/>
                 </a:solidFill>
                 <a:latin typeface="Microsoft JhengHei" panose="020B0604030504040204" pitchFamily="34" charset="-120"/>
                 <a:ea typeface="Microsoft JhengHei" panose="020B0604030504040204" pitchFamily="34" charset="-120"/>
               </a:rPr>
-              <a:t>2 </a:t>
-            </a:r>
-            <a:r>
-              <a:rPr lang="en-US" sz="2800" b="1" dirty="0">
-                <a:solidFill>
-                  <a:srgbClr val="000066"/>
-                </a:solidFill>
-                <a:latin typeface="Microsoft JhengHei" panose="020B0604030504040204" pitchFamily="34" charset="-120"/>
-                <a:ea typeface="Microsoft JhengHei" panose="020B0604030504040204" pitchFamily="34" charset="-120"/>
-              </a:rPr>
-              <a:t>)</a:t>
-            </a:r>
-            <a:endParaRPr lang="vi-VN" sz="2800" b="1" dirty="0">
+              <a:t> )</a:t>
+            </a:r>
+            <a:endParaRPr lang="vi-VN" sz="3200" b="1" dirty="0">
               <a:solidFill>
                 <a:srgbClr val="000066"/>
               </a:solidFill>
@@ -4295,7 +4230,7 @@
     </p:spTree>
     <p:extLst>
       <p:ext uri="{BB962C8B-B14F-4D97-AF65-F5344CB8AC3E}">
-        <p14:creationId xmlns:p14="http://schemas.microsoft.com/office/powerpoint/2010/main" val="848433728"/>
+        <p14:creationId xmlns:p14="http://schemas.microsoft.com/office/powerpoint/2010/main" val="920311419"/>
       </p:ext>
     </p:extLst>
   </p:cSld>
@@ -4306,7 +4241,7 @@
 </file>
 
 <file path=ppt/theme/theme1.xml><?xml version="1.0" encoding="utf-8"?>
-<a:theme xmlns:a="http://schemas.openxmlformats.org/drawingml/2006/main" name="chongbai">
+<a:theme xmlns:a="http://schemas.openxmlformats.org/drawingml/2006/main" name="Theme1">
   <a:themeElements>
     <a:clrScheme name="Office">
       <a:dk1>
@@ -4585,5 +4520,10 @@
   </a:themeElements>
   <a:objectDefaults/>
   <a:extraClrSchemeLst/>
+  <a:extLst>
+    <a:ext uri="{05A4C25C-085E-4340-85A3-A5531E510DB2}">
+      <thm15:themeFamily xmlns:thm15="http://schemas.microsoft.com/office/thememl/2012/main" name="中文詩歌儲存" id="{E0DF756C-B689-4A49-A343-6050050733AA}" vid="{979C1A4B-FDC7-484D-A782-7FA72675E23C}"/>
+    </a:ext>
+  </a:extLst>
 </a:theme>
 </file>